--- a/2026-Q4/06-LoveCompassionTruth/Week06-LoveCompassionAndTruth.pptx
+++ b/2026-Q4/06-LoveCompassionTruth/Week06-LoveCompassionAndTruth.pptx
@@ -4,6 +4,9 @@
   <p:sldMasterIdLst>
     <p:sldMasterId id="2147483648" r:id="rId1"/>
   </p:sldMasterIdLst>
+  <p:notesMasterIdLst>
+    <p:notesMasterId r:id="rId9"/>
+  </p:notesMasterIdLst>
   <p:sldIdLst>
     <p:sldId id="256" r:id="rId2"/>
     <p:sldId id="257" r:id="rId3"/>
@@ -13,10 +16,7 @@
     <p:sldId id="261" r:id="rId7"/>
     <p:sldId id="262" r:id="rId8"/>
   </p:sldIdLst>
-  <p:notesMasterIdLst>
-    <p:notesMasterId r:id="rId9"/>
-  </p:notesMasterIdLst>
-  <p:sldSz cx="9144000" cy="6858000"/>
+  <p:sldSz cx="9144000" cy="6858000" type="screen4x3"/>
   <p:notesSz cx="6858000" cy="9144000"/>
   <p:defaultTextStyle>
     <a:lvl1pPr marL="0" algn="l" defTabSz="914400" rtl="0" eaLnBrk="1" latinLnBrk="0" hangingPunct="1">
@@ -110,6 +110,11 @@
       </a:defRPr>
     </a:lvl9pPr>
   </p:defaultTextStyle>
+  <p:extLst>
+    <p:ext uri="{EFAFB233-063F-42B5-8137-9DF3F51BA10A}">
+      <p15:sldGuideLst xmlns:p15="http://schemas.microsoft.com/office/powerpoint/2012/main"/>
+    </p:ext>
+  </p:extLst>
 </p:presentation>
 </file>
 
@@ -135,234 +140,10 @@
           <a:chExt cx="0" cy="0"/>
         </a:xfrm>
       </p:grpSpPr>
-      <p:sp>
-        <p:nvSpPr>
-          <p:cNvPr id="2" name="Header Placeholder 1"/>
-          <p:cNvSpPr>
-            <a:spLocks noGrp="1"/>
-          </p:cNvSpPr>
-          <p:nvPr>
-            <p:ph type="hdr" sz="quarter"/>
-          </p:nvPr>
-        </p:nvSpPr>
-        <p:spPr>
-          <a:xfrm>
-            <a:off x="0" y="0"/>
-            <a:ext cx="2971800" cy="458788"/>
-          </a:xfrm>
-          <a:prstGeom prst="rect">
-            <a:avLst/>
-          </a:prstGeom>
-        </p:spPr>
-        <p:txBody>
-          <a:bodyPr vert="horz" lIns="91440" tIns="45720" rIns="91440" bIns="45720" rtlCol="0"/>
-          <a:lstStyle>
-            <a:lvl1pPr algn="l">
-              <a:defRPr sz="1200"/>
-            </a:lvl1pPr>
-          </a:lstStyle>
-          <a:p>
-            <a:endParaRPr lang="en-US"/>
-          </a:p>
-        </p:txBody>
-      </p:sp>
-      <p:sp>
-        <p:nvSpPr>
-          <p:cNvPr id="3" name="Date Placeholder 2"/>
-          <p:cNvSpPr>
-            <a:spLocks noGrp="1"/>
-          </p:cNvSpPr>
-          <p:nvPr>
-            <p:ph type="dt" idx="1"/>
-          </p:nvPr>
-        </p:nvSpPr>
-        <p:spPr>
-          <a:xfrm>
-            <a:off x="3884613" y="0"/>
-            <a:ext cx="2971800" cy="458788"/>
-          </a:xfrm>
-          <a:prstGeom prst="rect">
-            <a:avLst/>
-          </a:prstGeom>
-        </p:spPr>
-        <p:txBody>
-          <a:bodyPr vert="horz" lIns="91440" tIns="45720" rIns="91440" bIns="45720" rtlCol="0"/>
-          <a:lstStyle>
-            <a:lvl1pPr algn="r">
-              <a:defRPr sz="1200"/>
-            </a:lvl1pPr>
-          </a:lstStyle>
-          <a:p>
-            <a:fld id="{5282F153-3F37-0F45-9E97-73ACFA13230C}" type="datetimeFigureOut">
-              <a:rPr lang="en-US"/>
-              <a:t>7/23/19</a:t>
-            </a:fld>
-            <a:endParaRPr lang="en-US"/>
-          </a:p>
-        </p:txBody>
-      </p:sp>
-      <p:sp>
-        <p:nvSpPr>
-          <p:cNvPr id="4" name="Slide Image Placeholder 3"/>
-          <p:cNvSpPr>
-            <a:spLocks noGrp="1" noRot="1" noChangeAspect="1"/>
-          </p:cNvSpPr>
-          <p:nvPr>
-            <p:ph type="sldImg" idx="2"/>
-          </p:nvPr>
-        </p:nvSpPr>
-        <p:spPr>
-          <a:xfrm>
-            <a:off x="685800" y="1143000"/>
-            <a:ext cx="5486400" cy="3086100"/>
-          </a:xfrm>
-          <a:prstGeom prst="rect">
-            <a:avLst/>
-          </a:prstGeom>
-          <a:noFill/>
-          <a:ln w="12700">
-            <a:solidFill>
-              <a:prstClr val="black"/>
-            </a:solidFill>
-          </a:ln>
-        </p:spPr>
-        <p:txBody>
-          <a:bodyPr vert="horz" lIns="91440" tIns="45720" rIns="91440" bIns="45720" rtlCol="0" anchor="ctr"/>
-          <a:lstStyle/>
-          <a:p>
-            <a:endParaRPr lang="en-US"/>
-          </a:p>
-        </p:txBody>
-      </p:sp>
-      <p:sp>
-        <p:nvSpPr>
-          <p:cNvPr id="5" name="Notes Placeholder 4"/>
-          <p:cNvSpPr>
-            <a:spLocks noGrp="1"/>
-          </p:cNvSpPr>
-          <p:nvPr>
-            <p:ph type="body" sz="quarter" idx="3"/>
-          </p:nvPr>
-        </p:nvSpPr>
-        <p:spPr>
-          <a:xfrm>
-            <a:off x="685800" y="4400550"/>
-            <a:ext cx="5486400" cy="3600450"/>
-          </a:xfrm>
-          <a:prstGeom prst="rect">
-            <a:avLst/>
-          </a:prstGeom>
-        </p:spPr>
-        <p:txBody>
-          <a:bodyPr vert="horz" lIns="91440" tIns="45720" rIns="91440" bIns="45720" rtlCol="0"/>
-          <a:lstStyle/>
-          <a:p>
-            <a:pPr lvl="0"/>
-            <a:r>
-              <a:rPr lang="en-US"/>
-              <a:t>Click to edit Master text styles</a:t>
-            </a:r>
-          </a:p>
-          <a:p>
-            <a:pPr lvl="1"/>
-            <a:r>
-              <a:rPr lang="en-US"/>
-              <a:t>Second level</a:t>
-            </a:r>
-          </a:p>
-          <a:p>
-            <a:pPr lvl="2"/>
-            <a:r>
-              <a:rPr lang="en-US"/>
-              <a:t>Third level</a:t>
-            </a:r>
-          </a:p>
-          <a:p>
-            <a:pPr lvl="3"/>
-            <a:r>
-              <a:rPr lang="en-US"/>
-              <a:t>Fourth level</a:t>
-            </a:r>
-          </a:p>
-          <a:p>
-            <a:pPr lvl="4"/>
-            <a:r>
-              <a:rPr lang="en-US"/>
-              <a:t>Fifth level</a:t>
-            </a:r>
-          </a:p>
-        </p:txBody>
-      </p:sp>
-      <p:sp>
-        <p:nvSpPr>
-          <p:cNvPr id="6" name="Footer Placeholder 5"/>
-          <p:cNvSpPr>
-            <a:spLocks noGrp="1"/>
-          </p:cNvSpPr>
-          <p:nvPr>
-            <p:ph type="ftr" sz="quarter" idx="4"/>
-          </p:nvPr>
-        </p:nvSpPr>
-        <p:spPr>
-          <a:xfrm>
-            <a:off x="0" y="8685213"/>
-            <a:ext cx="2971800" cy="458787"/>
-          </a:xfrm>
-          <a:prstGeom prst="rect">
-            <a:avLst/>
-          </a:prstGeom>
-        </p:spPr>
-        <p:txBody>
-          <a:bodyPr vert="horz" lIns="91440" tIns="45720" rIns="91440" bIns="45720" rtlCol="0" anchor="b"/>
-          <a:lstStyle>
-            <a:lvl1pPr algn="l">
-              <a:defRPr sz="1200"/>
-            </a:lvl1pPr>
-          </a:lstStyle>
-          <a:p>
-            <a:endParaRPr lang="en-US"/>
-          </a:p>
-        </p:txBody>
-      </p:sp>
-      <p:sp>
-        <p:nvSpPr>
-          <p:cNvPr id="7" name="Slide Number Placeholder 6"/>
-          <p:cNvSpPr>
-            <a:spLocks noGrp="1"/>
-          </p:cNvSpPr>
-          <p:nvPr>
-            <p:ph type="sldNum" sz="quarter" idx="5"/>
-          </p:nvPr>
-        </p:nvSpPr>
-        <p:spPr>
-          <a:xfrm>
-            <a:off x="3884613" y="8685213"/>
-            <a:ext cx="2971800" cy="458787"/>
-          </a:xfrm>
-          <a:prstGeom prst="rect">
-            <a:avLst/>
-          </a:prstGeom>
-        </p:spPr>
-        <p:txBody>
-          <a:bodyPr vert="horz" lIns="91440" tIns="45720" rIns="91440" bIns="45720" rtlCol="0" anchor="b"/>
-          <a:lstStyle>
-            <a:lvl1pPr algn="r">
-              <a:defRPr sz="1200"/>
-            </a:lvl1pPr>
-          </a:lstStyle>
-          <a:p>
-            <a:fld id="{CE5E9CC1-C706-0F49-92D6-E571CC5EEA8F}" type="slidenum">
-              <a:rPr lang="en-US"/>
-              <a:t>‹#›</a:t>
-            </a:fld>
-            <a:endParaRPr lang="en-US"/>
-          </a:p>
-        </p:txBody>
-      </p:sp>
     </p:spTree>
     <p:extLst>
       <p:ext uri="{BB962C8B-B14F-4D97-AF65-F5344CB8AC3E}">
-        <p14:creationId xmlns:p14="http://schemas.microsoft.com/office/powerpoint/2010/main" val="1024086991"/>
+        <p14:creationId xmlns:p14="http://schemas.microsoft.com/office/powerpoint/2010/main" val="3344001713"/>
       </p:ext>
     </p:extLst>
   </p:cSld>
@@ -510,7 +291,6 @@
               <a:rPr lang="en-US" dirty="0"/>
               <a:t>[0:00] TONE-SET, and it matters more this week than any other. Say up front: “This is not a lesson against compassion. Compassion is commanded. It is a lesson about what happens when compassion is cut loose from truth — and it starts, of all places, in Eden.” If the room hears “he’s against being kind,” the hour is lost. Lead warm.</a:t>
             </a:r>
-            <a:endParaRPr lang="en-US" dirty="0"/>
           </a:p>
         </p:txBody>
       </p:sp>
@@ -602,7 +382,6 @@
 [CLICK] The three-part reframe — God as withholder, the forbidden as beneficial, self as the standard. Note: the fruit really WAS pleasant; the lie wasn’t about the fruit’s qualities, it was about who decides.
 [CLICK] The core: a change of AUTHORITY, not merely a bad craving. “What did God say” vs. “What seems good to me.” This is the whole week in one line — and it is why a lesson on compassion begins at the Fall: compassion cut loose from the word makes ME the judge of good, exactly as in Eden. Transition: “Hold that — now watch it happen with a virtue we all prize.”</a:t>
             </a:r>
-            <a:endParaRPr lang="en-US" dirty="0"/>
           </a:p>
         </p:txBody>
       </p:sp>
@@ -693,7 +472,6 @@
 [CLICK] Ultimate good vs. immediate comfort — a parent, a doctor, a good friend all know these can diverge. Love aims at the former.
 [CLICK] The pit images. Careful definitional note: people use “empathy” and “sympathy” loosely and interchangeably — do NOT let this become a vocabulary fight or an attack on the word “empathy.” The POINT is the posture: to help someone out of a hole you cannot be in the hole with them. Feeling-with is good; being-swept-away is not. Heb 4:15: Christ is the model — he understands our weakness completely (fully feels-with) YET without sin (never swept from the truth). Perfect sympathy, solid ground. Transition: “Here is where it turns dangerous.”</a:t>
             </a:r>
-            <a:endParaRPr lang="en-US" dirty="0"/>
           </a:p>
         </p:txBody>
       </p:sp>
@@ -785,7 +563,6 @@
 [CLICK] God’s own compassion — the AND is the hinge. Compassionate AND disciplines AND calls to repentance. A god who only ever soothes is not the God of Scripture; he’s an idol made of our comfort.
 [CLICK] The surgeon image — land it gently. Withholding a hard truth to avoid displeasure is not love. Transition: “So are we forced to choose — truth or compassion?”</a:t>
             </a:r>
-            <a:endParaRPr lang="en-US" dirty="0"/>
           </a:p>
         </p:txBody>
       </p:sp>
@@ -878,7 +655,6 @@
 [CLICK] Unpack both roles. The cure for bad compassion is never coldness — it is rightly-ordered compassion.
 [CLICK] Grace-first anchor (the Week 4/7/9/12 refrain) — the truth we speak is not cold correction; it rests on the cross. Straight to discussion.</a:t>
             </a:r>
-            <a:endParaRPr lang="en-US" dirty="0"/>
           </a:p>
         </p:txBody>
       </p:sp>
@@ -970,7 +746,6 @@
 Q2: Two failure modes, like the Berean two halves. Truth-weaponizers need the “in love”; love-surrenderers need the “truth.” Ask them to name their own — gently. Do NOT let this become naming other people’s sins in absentia.
 [CLICK] Read the care-note aloud if the room drifts toward venting about a specific person.</a:t>
             </a:r>
-            <a:endParaRPr lang="en-US" dirty="0"/>
           </a:p>
         </p:txBody>
       </p:sp>
@@ -1062,7 +837,6 @@
 [CLICK] Carry sentence — say it together.
 [CLICK] Close on Eph 4:15 — send them out toward maturity, not toward a fight. Dismiss on time.</a:t>
             </a:r>
-            <a:endParaRPr lang="en-US" dirty="0"/>
           </a:p>
         </p:txBody>
       </p:sp>
@@ -1135,6 +909,11 @@
 <file path=ppt/slideMasters/slideMaster1.xml><?xml version="1.0" encoding="utf-8"?>
 <p:sldMaster xmlns:a="http://schemas.openxmlformats.org/drawingml/2006/main" xmlns:r="http://schemas.openxmlformats.org/officeDocument/2006/relationships" xmlns:p="http://schemas.openxmlformats.org/presentationml/2006/main">
   <p:cSld>
+    <p:bg>
+      <p:bgRef idx="1001">
+        <a:schemeClr val="bg1"/>
+      </p:bgRef>
+    </p:bg>
     <p:spTree>
       <p:nvGrpSpPr>
         <p:cNvPr id="1" name=""/>
@@ -1447,7 +1226,7 @@
           <a:bodyPr wrap="square" lIns="0" tIns="0" rIns="0" bIns="0" rtlCol="0" anchor="t"/>
           <a:lstStyle/>
           <a:p>
-            <a:pPr algn="ctr" indent="0" marL="0">
+            <a:pPr marL="0" indent="0" algn="ctr">
               <a:buNone/>
             </a:pPr>
             <a:r>
@@ -1459,7 +1238,7 @@
                 <a:ea typeface="Arial" pitchFamily="34" charset="-122"/>
                 <a:cs typeface="Arial" pitchFamily="34" charset="-120"/>
               </a:rPr>
-              <a:t>The Obedience of Faith — Week 6  ·  Unit II: Discernment</a:t>
+              <a:t>The Obedience of Faith - Week 6  ·  Unit II: Discernment</a:t>
             </a:r>
             <a:endParaRPr lang="en-US" sz="1600" dirty="0"/>
           </a:p>
@@ -1486,7 +1265,7 @@
           <a:bodyPr wrap="square" lIns="0" tIns="0" rIns="0" bIns="0" rtlCol="0" anchor="t"/>
           <a:lstStyle/>
           <a:p>
-            <a:pPr algn="ctr" indent="0" marL="0">
+            <a:pPr marL="0" indent="0" algn="ctr">
               <a:buNone/>
             </a:pPr>
             <a:r>
@@ -1525,7 +1304,7 @@
           <a:bodyPr wrap="square" lIns="0" tIns="0" rIns="0" bIns="0" rtlCol="0" anchor="t"/>
           <a:lstStyle/>
           <a:p>
-            <a:pPr algn="ctr" indent="0" marL="0">
+            <a:pPr marL="0" indent="0" algn="ctr">
               <a:buNone/>
             </a:pPr>
             <a:r>
@@ -1564,11 +1343,11 @@
           <a:bodyPr wrap="square" lIns="0" tIns="0" rIns="0" bIns="0" rtlCol="0" anchor="t"/>
           <a:lstStyle/>
           <a:p>
-            <a:pPr algn="ctr" indent="0" marL="0">
+            <a:pPr marL="0" indent="0" algn="ctr">
               <a:buNone/>
             </a:pPr>
             <a:r>
-              <a:rPr lang="en-US" sz="2100" i="1" dirty="0">
+              <a:rPr lang="en-US" sz="2800" i="1" dirty="0">
                 <a:solidFill>
                   <a:srgbClr val="000000"/>
                 </a:solidFill>
@@ -1578,17 +1357,14 @@
               </a:rPr>
               <a:t>“Love… is not glad about injustice, but rejoices in the truth.”</a:t>
             </a:r>
-            <a:pPr algn="ctr" indent="0" marL="0">
+            <a:endParaRPr lang="en-US" sz="2000" dirty="0"/>
+          </a:p>
+          <a:p>
+            <a:pPr marL="0" indent="0" algn="ctr">
               <a:buNone/>
             </a:pPr>
-            <a:endParaRPr lang="en-US" sz="1600" dirty="0"/>
-          </a:p>
-          <a:p>
-            <a:pPr algn="ctr" indent="0" marL="0">
-              <a:buNone/>
-            </a:pPr>
-            <a:r>
-              <a:rPr lang="en-US" sz="1800" dirty="0">
+            <a:r>
+              <a:rPr lang="en-US" sz="2400" dirty="0">
                 <a:solidFill>
                   <a:srgbClr val="000000"/>
                 </a:solidFill>
@@ -1598,7 +1374,7 @@
               </a:rPr>
               <a:t>(1 Corinthians 13:6)</a:t>
             </a:r>
-            <a:endParaRPr lang="en-US" sz="1600" dirty="0"/>
+            <a:endParaRPr lang="en-US" sz="2000" dirty="0"/>
           </a:p>
         </p:txBody>
       </p:sp>
@@ -1623,7 +1399,7 @@
           <a:bodyPr wrap="square" lIns="0" tIns="0" rIns="0" bIns="0" rtlCol="0" anchor="t"/>
           <a:lstStyle/>
           <a:p>
-            <a:pPr algn="ctr" indent="0" marL="0">
+            <a:pPr marL="0" indent="0" algn="ctr">
               <a:buNone/>
             </a:pPr>
             <a:r>
@@ -1634,7 +1410,7 @@
                 <a:latin typeface="Arial" pitchFamily="34" charset="0"/>
                 <a:ea typeface="Arial" pitchFamily="34" charset="-122"/>
                 <a:cs typeface="Arial" pitchFamily="34" charset="-120"/>
-                <a:hlinkClick r:id="rId1" invalidUrl="" action="" tgtFrame="" tooltip="" history="1" highlightClick="0" endSnd="0">
+                <a:hlinkClick r:id="rId3">
                   <a:extLst>
                     <a:ext uri="{A12FA001-AC4F-418D-AE19-62706E023703}">
                       <ahyp:hlinkClr xmlns:ahyp="http://schemas.microsoft.com/office/drawing/2018/hyperlinkcolor" val="tx"/>
@@ -1642,7 +1418,36 @@
                   </a:extLst>
                 </a:hlinkClick>
               </a:rPr>
-              <a:t>https://tinyurl.com/TeachTheWord</a:t>
+              <a:t>https://</a:t>
+            </a:r>
+            <a:r>
+              <a:rPr lang="en-US" sz="1600" b="1" u="sng" dirty="0" err="1">
+                <a:solidFill>
+                  <a:srgbClr val="4F81BD"/>
+                </a:solidFill>
+                <a:latin typeface="Arial" pitchFamily="34" charset="0"/>
+                <a:ea typeface="Arial" pitchFamily="34" charset="-122"/>
+                <a:cs typeface="Arial" pitchFamily="34" charset="-120"/>
+                <a:hlinkClick r:id="rId3">
+                  <a:extLst>
+                    <a:ext uri="{A12FA001-AC4F-418D-AE19-62706E023703}">
+                      <ahyp:hlinkClr xmlns:ahyp="http://schemas.microsoft.com/office/drawing/2018/hyperlinkcolor" val="tx"/>
+                    </a:ext>
+                  </a:extLst>
+                </a:hlinkClick>
+              </a:rPr>
+              <a:t>TeachTheWord</a:t>
+            </a:r>
+            <a:r>
+              <a:rPr lang="en-US" sz="1600" b="1" u="sng" dirty="0" err="1">
+                <a:solidFill>
+                  <a:srgbClr val="4F81BD"/>
+                </a:solidFill>
+                <a:latin typeface="Arial" pitchFamily="34" charset="0"/>
+                <a:ea typeface="Arial" pitchFamily="34" charset="-122"/>
+                <a:cs typeface="Arial" pitchFamily="34" charset="-120"/>
+              </a:rPr>
+              <a:t>.Church</a:t>
             </a:r>
             <a:endParaRPr lang="en-US" sz="1600" dirty="0"/>
           </a:p>
@@ -1694,7 +1499,7 @@
           <a:bodyPr wrap="square" lIns="0" tIns="0" rIns="0" bIns="0" rtlCol="0" anchor="t"/>
           <a:lstStyle/>
           <a:p>
-            <a:pPr algn="l" indent="0" marL="0">
+            <a:pPr marL="0" indent="0" algn="l">
               <a:buNone/>
             </a:pPr>
             <a:r>
@@ -1733,11 +1538,11 @@
           <a:bodyPr wrap="square" lIns="0" tIns="0" rIns="0" bIns="0" rtlCol="0" anchor="t"/>
           <a:lstStyle/>
           <a:p>
-            <a:pPr algn="l" indent="0" marL="0">
+            <a:pPr marL="0" indent="0" algn="l">
               <a:buNone/>
             </a:pPr>
             <a:r>
-              <a:rPr lang="en-US" sz="1300" b="1" dirty="0">
+              <a:rPr lang="en-US" sz="2000" b="1" dirty="0">
                 <a:solidFill>
                   <a:srgbClr val="4F81BD"/>
                 </a:solidFill>
@@ -1745,9 +1550,9 @@
                 <a:ea typeface="Arial" pitchFamily="34" charset="-122"/>
                 <a:cs typeface="Arial" pitchFamily="34" charset="-120"/>
               </a:rPr>
-              <a:t>Genesis 3 — the serpent’s method was reframing, not force</a:t>
-            </a:r>
-            <a:endParaRPr lang="en-US" sz="1600" dirty="0"/>
+              <a:t>Genesis 3 - the serpent’s method was reframing, not force</a:t>
+            </a:r>
+            <a:endParaRPr lang="en-US" sz="2800" dirty="0"/>
           </a:p>
         </p:txBody>
       </p:sp>
@@ -1772,11 +1577,11 @@
           <a:bodyPr wrap="square" lIns="0" tIns="0" rIns="0" bIns="0" rtlCol="0" anchor="t"/>
           <a:lstStyle/>
           <a:p>
-            <a:pPr algn="l" indent="0" marL="0">
+            <a:pPr marL="0" indent="0" algn="l">
               <a:buNone/>
             </a:pPr>
             <a:r>
-              <a:rPr lang="en-US" sz="1500" dirty="0">
+              <a:rPr lang="en-US" sz="2000" dirty="0">
                 <a:solidFill>
                   <a:srgbClr val="000000"/>
                 </a:solidFill>
@@ -1786,11 +1591,8 @@
               </a:rPr>
               <a:t>The serpent never grabs the fruit or forces a hand. </a:t>
             </a:r>
-            <a:pPr algn="l" indent="0" marL="0">
-              <a:buNone/>
-            </a:pPr>
-            <a:r>
-              <a:rPr lang="en-US" sz="1500" b="1" dirty="0">
+            <a:r>
+              <a:rPr lang="en-US" sz="2000" b="1" dirty="0">
                 <a:solidFill>
                   <a:srgbClr val="1F497D"/>
                 </a:solidFill>
@@ -1798,9 +1600,32 @@
                 <a:ea typeface="Arial" pitchFamily="34" charset="-122"/>
                 <a:cs typeface="Arial" pitchFamily="34" charset="-120"/>
               </a:rPr>
-              <a:t>His whole attack is on one thing — the authority of God’s word.</a:t>
-            </a:r>
-            <a:endParaRPr lang="en-US" sz="1600" dirty="0"/>
+              <a:t>His whole attack is on one thing </a:t>
+            </a:r>
+            <a:r>
+              <a:rPr lang="en-US" sz="2000" b="1" dirty="0">
+                <a:solidFill>
+                  <a:srgbClr val="1F497D"/>
+                </a:solidFill>
+                <a:latin typeface="Arial" pitchFamily="34" charset="0"/>
+                <a:ea typeface="Arial" pitchFamily="34" charset="-122"/>
+                <a:cs typeface="Arial" pitchFamily="34" charset="-120"/>
+                <a:sym typeface="Wingdings" pitchFamily="2" charset="2"/>
+              </a:rPr>
+              <a:t></a:t>
+            </a:r>
+            <a:r>
+              <a:rPr lang="en-US" sz="2000" b="1" dirty="0">
+                <a:solidFill>
+                  <a:srgbClr val="1F497D"/>
+                </a:solidFill>
+                <a:latin typeface="Arial" pitchFamily="34" charset="0"/>
+                <a:ea typeface="Arial" pitchFamily="34" charset="-122"/>
+                <a:cs typeface="Arial" pitchFamily="34" charset="-120"/>
+              </a:rPr>
+              <a:t> the authority of God’s word.</a:t>
+            </a:r>
+            <a:endParaRPr lang="en-US" sz="2400" dirty="0"/>
           </a:p>
         </p:txBody>
       </p:sp>
@@ -1812,8 +1637,8 @@
         </p:nvSpPr>
         <p:spPr>
           <a:xfrm>
-            <a:off x="365760" y="2011680"/>
-            <a:ext cx="8412480" cy="960120"/>
+            <a:off x="365760" y="1798404"/>
+            <a:ext cx="8412480" cy="1163599"/>
           </a:xfrm>
           <a:prstGeom prst="rect">
             <a:avLst/>
@@ -1825,11 +1650,11 @@
           <a:bodyPr wrap="square" lIns="0" tIns="0" rIns="0" bIns="0" rtlCol="0" anchor="t"/>
           <a:lstStyle/>
           <a:p>
-            <a:pPr algn="l" indent="0" marL="0">
+            <a:pPr marL="0" indent="0" algn="l">
               <a:buNone/>
             </a:pPr>
             <a:r>
-              <a:rPr lang="en-US" sz="1600" b="1" i="1" dirty="0">
+              <a:rPr lang="en-US" sz="2000" b="1" i="1" dirty="0">
                 <a:solidFill>
                   <a:srgbClr val="000000"/>
                 </a:solidFill>
@@ -1839,11 +1664,25 @@
               </a:rPr>
               <a:t>“Is it really true that God said, ‘You must not eat from any tree of the orchard’?” </a:t>
             </a:r>
-            <a:pPr algn="l" indent="0" marL="0">
+            <a:r>
+              <a:rPr lang="en-US" b="1" dirty="0">
+                <a:solidFill>
+                  <a:srgbClr val="000000"/>
+                </a:solidFill>
+                <a:latin typeface="Arial" pitchFamily="34" charset="0"/>
+                <a:ea typeface="Arial" pitchFamily="34" charset="-122"/>
+                <a:cs typeface="Arial" pitchFamily="34" charset="-120"/>
+              </a:rPr>
+              <a:t>(Genesis 3:1)</a:t>
+            </a:r>
+            <a:endParaRPr lang="en-US" sz="2000" dirty="0"/>
+          </a:p>
+          <a:p>
+            <a:pPr marL="0" indent="0" algn="l">
               <a:buNone/>
             </a:pPr>
             <a:r>
-              <a:rPr lang="en-US" sz="1500" b="1" dirty="0">
+              <a:rPr lang="en-US" dirty="0">
                 <a:solidFill>
                   <a:srgbClr val="000000"/>
                 </a:solidFill>
@@ -1851,29 +1690,32 @@
                 <a:ea typeface="Arial" pitchFamily="34" charset="-122"/>
                 <a:cs typeface="Arial" pitchFamily="34" charset="-120"/>
               </a:rPr>
-              <a:t>(Genesis 3:1)</a:t>
-            </a:r>
-            <a:pPr algn="l" indent="0" marL="0">
-              <a:buNone/>
-            </a:pPr>
-            <a:endParaRPr lang="en-US" sz="1600" dirty="0"/>
-          </a:p>
-          <a:p>
-            <a:pPr algn="l" indent="0" marL="0">
-              <a:buNone/>
-            </a:pPr>
-            <a:r>
-              <a:rPr lang="en-US" sz="1400" dirty="0">
+              <a:t>Step one: “Did God really say?”  Not “God is wrong” </a:t>
+            </a:r>
+            <a:r>
+              <a:rPr lang="en-US" dirty="0">
                 <a:solidFill>
                   <a:srgbClr val="000000"/>
                 </a:solidFill>
                 <a:latin typeface="Arial" pitchFamily="34" charset="0"/>
                 <a:ea typeface="Arial" pitchFamily="34" charset="-122"/>
                 <a:cs typeface="Arial" pitchFamily="34" charset="-120"/>
-              </a:rPr>
-              <a:t>Step one: “Did God really say?”  Not “God is wrong” — just enough doubt to reopen a settled question.</a:t>
-            </a:r>
-            <a:endParaRPr lang="en-US" sz="1600" dirty="0"/>
+                <a:sym typeface="Wingdings" pitchFamily="2" charset="2"/>
+              </a:rPr>
+              <a:t> </a:t>
+            </a:r>
+            <a:r>
+              <a:rPr lang="en-US" dirty="0">
+                <a:solidFill>
+                  <a:srgbClr val="000000"/>
+                </a:solidFill>
+                <a:latin typeface="Arial" pitchFamily="34" charset="0"/>
+                <a:ea typeface="Arial" pitchFamily="34" charset="-122"/>
+                <a:cs typeface="Arial" pitchFamily="34" charset="-120"/>
+              </a:rPr>
+              <a:t>just enough doubt to reopen a settled question.</a:t>
+            </a:r>
+            <a:endParaRPr lang="en-US" sz="2000" dirty="0"/>
           </a:p>
         </p:txBody>
       </p:sp>
@@ -1885,8 +1727,8 @@
         </p:nvSpPr>
         <p:spPr>
           <a:xfrm>
-            <a:off x="365760" y="3063240"/>
-            <a:ext cx="8412480" cy="1234440"/>
+            <a:off x="365760" y="3126095"/>
+            <a:ext cx="8412480" cy="1987062"/>
           </a:xfrm>
           <a:prstGeom prst="rect">
             <a:avLst/>
@@ -1898,11 +1740,11 @@
           <a:bodyPr wrap="square" lIns="0" tIns="0" rIns="0" bIns="0" rtlCol="0" anchor="t"/>
           <a:lstStyle/>
           <a:p>
-            <a:pPr algn="l" indent="0" marL="0">
+            <a:pPr marL="0" indent="0" algn="l">
               <a:buNone/>
             </a:pPr>
             <a:r>
-              <a:rPr lang="en-US" sz="1450" b="1" dirty="0">
+              <a:rPr lang="en-US" b="1" dirty="0">
                 <a:solidFill>
                   <a:srgbClr val="000000"/>
                 </a:solidFill>
@@ -1913,11 +1755,8 @@
               <a:t>Then the reframe:
 </a:t>
             </a:r>
-            <a:pPr algn="l" indent="0" marL="0">
-              <a:buNone/>
-            </a:pPr>
-            <a:r>
-              <a:rPr lang="en-US" sz="1400" dirty="0">
+            <a:r>
+              <a:rPr lang="en-US" dirty="0">
                 <a:solidFill>
                   <a:srgbClr val="000000"/>
                 </a:solidFill>
@@ -1925,29 +1764,22 @@
                 <a:ea typeface="Arial" pitchFamily="34" charset="-122"/>
                 <a:cs typeface="Arial" pitchFamily="34" charset="-120"/>
               </a:rPr>
-              <a:t>•  God is withholding something good — “God knows that when you eat… you will be like God” (3:5)
-</a:t>
-            </a:r>
-            <a:pPr algn="l" indent="0" marL="0">
-              <a:buNone/>
-            </a:pPr>
-            <a:r>
-              <a:rPr lang="en-US" sz="1400" dirty="0">
+              <a:t>•  God is withholding something good </a:t>
+            </a:r>
+            <a:r>
+              <a:rPr lang="en-US" dirty="0">
                 <a:solidFill>
                   <a:srgbClr val="000000"/>
                 </a:solidFill>
                 <a:latin typeface="Arial" pitchFamily="34" charset="0"/>
                 <a:ea typeface="Arial" pitchFamily="34" charset="-122"/>
                 <a:cs typeface="Arial" pitchFamily="34" charset="-120"/>
-              </a:rPr>
-              <a:t>•  The fruit is beneficial — “good for food… pleasing to the eye… desirable for making one wise” (3:6)
-</a:t>
-            </a:r>
-            <a:pPr algn="l" indent="0" marL="0">
-              <a:buNone/>
-            </a:pPr>
-            <a:r>
-              <a:rPr lang="en-US" sz="1400" dirty="0">
+                <a:sym typeface="Wingdings" pitchFamily="2" charset="2"/>
+              </a:rPr>
+              <a:t> </a:t>
+            </a:r>
+            <a:r>
+              <a:rPr lang="en-US" dirty="0">
                 <a:solidFill>
                   <a:srgbClr val="000000"/>
                 </a:solidFill>
@@ -1955,9 +1787,57 @@
                 <a:ea typeface="Arial" pitchFamily="34" charset="-122"/>
                 <a:cs typeface="Arial" pitchFamily="34" charset="-120"/>
               </a:rPr>
-              <a:t>•  Your judgment is the better standard — so Eve evaluated God’s command by the creature’s claim.</a:t>
-            </a:r>
-            <a:endParaRPr lang="en-US" sz="1600" dirty="0"/>
+              <a:t>“God knows that when you eat… you will be like God” (3:5)
+•  The fruit is beneficial </a:t>
+            </a:r>
+            <a:r>
+              <a:rPr lang="en-US" dirty="0">
+                <a:solidFill>
+                  <a:srgbClr val="000000"/>
+                </a:solidFill>
+                <a:latin typeface="Arial" pitchFamily="34" charset="0"/>
+                <a:ea typeface="Arial" pitchFamily="34" charset="-122"/>
+                <a:cs typeface="Arial" pitchFamily="34" charset="-120"/>
+                <a:sym typeface="Wingdings" pitchFamily="2" charset="2"/>
+              </a:rPr>
+              <a:t></a:t>
+            </a:r>
+            <a:r>
+              <a:rPr lang="en-US" dirty="0">
+                <a:solidFill>
+                  <a:srgbClr val="000000"/>
+                </a:solidFill>
+                <a:latin typeface="Arial" pitchFamily="34" charset="0"/>
+                <a:ea typeface="Arial" pitchFamily="34" charset="-122"/>
+                <a:cs typeface="Arial" pitchFamily="34" charset="-120"/>
+              </a:rPr>
+              <a:t> “good for food… pleasing to the eye… desirable for making one wise” (3:6)
+•  Your judgment is the better standard </a:t>
+            </a:r>
+            <a:r>
+              <a:rPr lang="en-US" dirty="0">
+                <a:solidFill>
+                  <a:srgbClr val="000000"/>
+                </a:solidFill>
+                <a:latin typeface="Arial" pitchFamily="34" charset="0"/>
+                <a:ea typeface="Arial" pitchFamily="34" charset="-122"/>
+                <a:cs typeface="Arial" pitchFamily="34" charset="-120"/>
+                <a:sym typeface="Wingdings" pitchFamily="2" charset="2"/>
+              </a:rPr>
+              <a:t></a:t>
+            </a:r>
+            <a:r>
+              <a:rPr lang="en-US" dirty="0">
+                <a:solidFill>
+                  <a:srgbClr val="000000"/>
+                </a:solidFill>
+                <a:latin typeface="Arial" pitchFamily="34" charset="0"/>
+                <a:ea typeface="Arial" pitchFamily="34" charset="-122"/>
+                <a:cs typeface="Arial" pitchFamily="34" charset="-120"/>
+              </a:rPr>
+              <a:t> so Eve evaluated God’s command by the creature’s claim.</a:t>
+            </a:r>
+            <a:endParaRPr lang="en-US" sz="2000" dirty="0"/>
           </a:p>
         </p:txBody>
       </p:sp>
@@ -1969,8 +1849,8 @@
         </p:nvSpPr>
         <p:spPr>
           <a:xfrm>
-            <a:off x="365760" y="4434840"/>
-            <a:ext cx="8412480" cy="1691640"/>
+            <a:off x="365760" y="5277249"/>
+            <a:ext cx="8412480" cy="1471023"/>
           </a:xfrm>
           <a:prstGeom prst="rect">
             <a:avLst/>
@@ -1982,11 +1862,11 @@
           <a:bodyPr wrap="square" lIns="0" tIns="0" rIns="0" bIns="0" rtlCol="0" anchor="t"/>
           <a:lstStyle/>
           <a:p>
-            <a:pPr algn="l" indent="0" marL="0">
+            <a:pPr marL="0" indent="0" algn="l">
               <a:buNone/>
             </a:pPr>
             <a:r>
-              <a:rPr lang="en-US" sz="1600" b="1" dirty="0">
+              <a:rPr lang="en-US" sz="2000" b="1" dirty="0">
                 <a:solidFill>
                   <a:srgbClr val="1F497D"/>
                 </a:solidFill>
@@ -1997,11 +1877,24 @@
               <a:t>The core failure was not appetite. It was a change of authority.
 </a:t>
             </a:r>
-            <a:pPr algn="l" indent="0" marL="0">
+            <a:r>
+              <a:rPr lang="en-US" dirty="0">
+                <a:solidFill>
+                  <a:srgbClr val="000000"/>
+                </a:solidFill>
+                <a:latin typeface="Arial" pitchFamily="34" charset="0"/>
+                <a:ea typeface="Arial" pitchFamily="34" charset="-122"/>
+                <a:cs typeface="Arial" pitchFamily="34" charset="-120"/>
+              </a:rPr>
+              <a:t>The question shifted from “What did God say?” to “What seems good, desirable, and reasonable to me?”  Once feeling and perception outranked the word, the fruit was already as good as eaten. </a:t>
+            </a:r>
+          </a:p>
+          <a:p>
+            <a:pPr marL="0" indent="0" algn="l">
               <a:buNone/>
             </a:pPr>
             <a:r>
-              <a:rPr lang="en-US" sz="1450" dirty="0">
+              <a:rPr lang="en-US" i="1" dirty="0">
                 <a:solidFill>
                   <a:srgbClr val="000000"/>
                 </a:solidFill>
@@ -2009,23 +1902,9 @@
                 <a:ea typeface="Arial" pitchFamily="34" charset="-122"/>
                 <a:cs typeface="Arial" pitchFamily="34" charset="-120"/>
               </a:rPr>
-              <a:t>The question shifted from “What did God say?” to “What seems good, desirable, and reasonable to me?”  Once feeling and perception outranked the word, the fruit was already as good as eaten. </a:t>
-            </a:r>
-            <a:pPr algn="l" indent="0" marL="0">
-              <a:buNone/>
-            </a:pPr>
-            <a:r>
-              <a:rPr lang="en-US" sz="1400" i="1" dirty="0">
-                <a:solidFill>
-                  <a:srgbClr val="000000"/>
-                </a:solidFill>
-                <a:latin typeface="Arial" pitchFamily="34" charset="0"/>
-                <a:ea typeface="Arial" pitchFamily="34" charset="-122"/>
-                <a:cs typeface="Arial" pitchFamily="34" charset="-120"/>
-              </a:rPr>
               <a:t>Every temptation since runs the same play (2 Cor 11:3).</a:t>
             </a:r>
-            <a:endParaRPr lang="en-US" sz="1600" dirty="0"/>
+            <a:endParaRPr lang="en-US" sz="2000" dirty="0"/>
           </a:p>
         </p:txBody>
       </p:sp>
@@ -2043,26 +1922,26 @@
               <p:cTn id="2" dur="indefinite" nodeType="mainSeq">
                 <p:childTnLst>
                   <p:par>
-                    <p:cTn id="7" fill="hold">
+                    <p:cTn id="3" fill="hold">
                       <p:stCondLst>
                         <p:cond delay="indefinite"/>
                       </p:stCondLst>
                       <p:childTnLst>
                         <p:par>
-                          <p:cTn id="8" fill="hold">
+                          <p:cTn id="4" fill="hold">
                             <p:stCondLst>
                               <p:cond delay="0"/>
                             </p:stCondLst>
                             <p:childTnLst>
                               <p:par>
-                                <p:cTn id="3" presetID="42" presetClass="entr" presetSubtype="0" fill="hold" grpId="0" nodeType="clickEffect">
+                                <p:cTn id="5" presetID="42" presetClass="entr" presetSubtype="0" fill="hold" nodeType="clickEffect">
                                   <p:stCondLst>
                                     <p:cond delay="0"/>
                                   </p:stCondLst>
                                   <p:childTnLst>
                                     <p:set>
                                       <p:cBhvr>
-                                        <p:cTn id="4" dur="1" fill="hold">
+                                        <p:cTn id="6" dur="1" fill="hold">
                                           <p:stCondLst>
                                             <p:cond delay="0"/>
                                           </p:stCondLst>
@@ -2080,7 +1959,7 @@
                                     </p:set>
                                     <p:animEffect transition="in" filter="fade">
                                       <p:cBhvr>
-                                        <p:cTn id="5" dur="1000"/>
+                                        <p:cTn id="7" dur="1000"/>
                                         <p:tgtEl>
                                           <p:spTgt spid="4"/>
                                         </p:tgtEl>
@@ -2088,7 +1967,7 @@
                                     </p:animEffect>
                                     <p:anim calcmode="lin" valueType="num">
                                       <p:cBhvr>
-                                        <p:cTn id="6" dur="1000" fill="hold"/>
+                                        <p:cTn id="8" dur="1000" fill="hold"/>
                                         <p:tgtEl>
                                           <p:spTgt spid="4"/>
                                         </p:tgtEl>
@@ -2119,26 +1998,26 @@
                     </p:cTn>
                   </p:par>
                   <p:par>
-                    <p:cTn id="13" fill="hold">
+                    <p:cTn id="9" fill="hold">
                       <p:stCondLst>
                         <p:cond delay="indefinite"/>
                       </p:stCondLst>
                       <p:childTnLst>
                         <p:par>
-                          <p:cTn id="14" fill="hold">
+                          <p:cTn id="10" fill="hold">
                             <p:stCondLst>
                               <p:cond delay="0"/>
                             </p:stCondLst>
                             <p:childTnLst>
                               <p:par>
-                                <p:cTn id="9" presetID="42" presetClass="entr" presetSubtype="0" fill="hold" grpId="0" nodeType="clickEffect">
+                                <p:cTn id="11" presetID="42" presetClass="entr" presetSubtype="0" fill="hold" nodeType="clickEffect">
                                   <p:stCondLst>
                                     <p:cond delay="0"/>
                                   </p:stCondLst>
                                   <p:childTnLst>
                                     <p:set>
                                       <p:cBhvr>
-                                        <p:cTn id="10" dur="1" fill="hold">
+                                        <p:cTn id="12" dur="1" fill="hold">
                                           <p:stCondLst>
                                             <p:cond delay="0"/>
                                           </p:stCondLst>
@@ -2156,7 +2035,7 @@
                                     </p:set>
                                     <p:animEffect transition="in" filter="fade">
                                       <p:cBhvr>
-                                        <p:cTn id="11" dur="1000"/>
+                                        <p:cTn id="13" dur="1000"/>
                                         <p:tgtEl>
                                           <p:spTgt spid="5"/>
                                         </p:tgtEl>
@@ -2164,7 +2043,7 @@
                                     </p:animEffect>
                                     <p:anim calcmode="lin" valueType="num">
                                       <p:cBhvr>
-                                        <p:cTn id="12" dur="1000" fill="hold"/>
+                                        <p:cTn id="14" dur="1000" fill="hold"/>
                                         <p:tgtEl>
                                           <p:spTgt spid="5"/>
                                         </p:tgtEl>
@@ -2195,26 +2074,26 @@
                     </p:cTn>
                   </p:par>
                   <p:par>
-                    <p:cTn id="19" fill="hold">
+                    <p:cTn id="15" fill="hold">
                       <p:stCondLst>
                         <p:cond delay="indefinite"/>
                       </p:stCondLst>
                       <p:childTnLst>
                         <p:par>
-                          <p:cTn id="20" fill="hold">
+                          <p:cTn id="16" fill="hold">
                             <p:stCondLst>
                               <p:cond delay="0"/>
                             </p:stCondLst>
                             <p:childTnLst>
                               <p:par>
-                                <p:cTn id="15" presetID="42" presetClass="entr" presetSubtype="0" fill="hold" grpId="0" nodeType="clickEffect">
+                                <p:cTn id="17" presetID="42" presetClass="entr" presetSubtype="0" fill="hold" nodeType="clickEffect">
                                   <p:stCondLst>
                                     <p:cond delay="0"/>
                                   </p:stCondLst>
                                   <p:childTnLst>
                                     <p:set>
                                       <p:cBhvr>
-                                        <p:cTn id="16" dur="1" fill="hold">
+                                        <p:cTn id="18" dur="1" fill="hold">
                                           <p:stCondLst>
                                             <p:cond delay="0"/>
                                           </p:stCondLst>
@@ -2232,7 +2111,7 @@
                                     </p:set>
                                     <p:animEffect transition="in" filter="fade">
                                       <p:cBhvr>
-                                        <p:cTn id="17" dur="1000"/>
+                                        <p:cTn id="19" dur="1000"/>
                                         <p:tgtEl>
                                           <p:spTgt spid="6"/>
                                         </p:tgtEl>
@@ -2240,7 +2119,7 @@
                                     </p:animEffect>
                                     <p:anim calcmode="lin" valueType="num">
                                       <p:cBhvr>
-                                        <p:cTn id="18" dur="1000" fill="hold"/>
+                                        <p:cTn id="20" dur="1000" fill="hold"/>
                                         <p:tgtEl>
                                           <p:spTgt spid="6"/>
                                         </p:tgtEl>
@@ -2271,26 +2150,26 @@
                     </p:cTn>
                   </p:par>
                   <p:par>
-                    <p:cTn id="25" fill="hold">
+                    <p:cTn id="21" fill="hold">
                       <p:stCondLst>
                         <p:cond delay="indefinite"/>
                       </p:stCondLst>
                       <p:childTnLst>
                         <p:par>
-                          <p:cTn id="26" fill="hold">
+                          <p:cTn id="22" fill="hold">
                             <p:stCondLst>
                               <p:cond delay="0"/>
                             </p:stCondLst>
                             <p:childTnLst>
                               <p:par>
-                                <p:cTn id="21" presetID="42" presetClass="entr" presetSubtype="0" fill="hold" grpId="0" nodeType="clickEffect">
+                                <p:cTn id="23" presetID="42" presetClass="entr" presetSubtype="0" fill="hold" nodeType="clickEffect">
                                   <p:stCondLst>
                                     <p:cond delay="0"/>
                                   </p:stCondLst>
                                   <p:childTnLst>
                                     <p:set>
                                       <p:cBhvr>
-                                        <p:cTn id="22" dur="1" fill="hold">
+                                        <p:cTn id="24" dur="1" fill="hold">
                                           <p:stCondLst>
                                             <p:cond delay="0"/>
                                           </p:stCondLst>
@@ -2308,7 +2187,7 @@
                                     </p:set>
                                     <p:animEffect transition="in" filter="fade">
                                       <p:cBhvr>
-                                        <p:cTn id="23" dur="1000"/>
+                                        <p:cTn id="25" dur="1000"/>
                                         <p:tgtEl>
                                           <p:spTgt spid="7"/>
                                         </p:tgtEl>
@@ -2316,7 +2195,7 @@
                                     </p:animEffect>
                                     <p:anim calcmode="lin" valueType="num">
                                       <p:cBhvr>
-                                        <p:cTn id="24" dur="1000" fill="hold"/>
+                                        <p:cTn id="26" dur="1000" fill="hold"/>
                                         <p:tgtEl>
                                           <p:spTgt spid="7"/>
                                         </p:tgtEl>
@@ -2409,7 +2288,7 @@
           <a:bodyPr wrap="square" lIns="0" tIns="0" rIns="0" bIns="0" rtlCol="0" anchor="t"/>
           <a:lstStyle/>
           <a:p>
-            <a:pPr algn="l" indent="0" marL="0">
+            <a:pPr marL="0" indent="0" algn="l">
               <a:buNone/>
             </a:pPr>
             <a:r>
@@ -2448,11 +2327,11 @@
           <a:bodyPr wrap="square" lIns="0" tIns="0" rIns="0" bIns="0" rtlCol="0" anchor="t"/>
           <a:lstStyle/>
           <a:p>
-            <a:pPr algn="l" indent="0" marL="0">
+            <a:pPr marL="0" indent="0" algn="l">
               <a:buNone/>
             </a:pPr>
             <a:r>
-              <a:rPr lang="en-US" sz="1300" b="1" dirty="0">
+              <a:rPr lang="en-US" sz="2000" b="1" dirty="0">
                 <a:solidFill>
                   <a:srgbClr val="4F81BD"/>
                 </a:solidFill>
@@ -2460,9 +2339,9 @@
                 <a:ea typeface="Arial" pitchFamily="34" charset="-122"/>
                 <a:cs typeface="Arial" pitchFamily="34" charset="-120"/>
               </a:rPr>
-              <a:t>1 Cor 13 — love and truth are never rivals</a:t>
-            </a:r>
-            <a:endParaRPr lang="en-US" sz="1600" dirty="0"/>
+              <a:t>1 Cor 13 - love and truth are never rivals</a:t>
+            </a:r>
+            <a:endParaRPr lang="en-US" sz="2800" dirty="0"/>
           </a:p>
         </p:txBody>
       </p:sp>
@@ -2487,11 +2366,11 @@
           <a:bodyPr wrap="square" lIns="0" tIns="0" rIns="0" bIns="0" rtlCol="0" anchor="t"/>
           <a:lstStyle/>
           <a:p>
-            <a:pPr algn="l" indent="0" marL="0">
+            <a:pPr marL="0" indent="0" algn="l">
               <a:buNone/>
             </a:pPr>
             <a:r>
-              <a:rPr lang="en-US" sz="1500" b="1" i="1" dirty="0">
+              <a:rPr lang="en-US" b="1" i="1" dirty="0">
                 <a:solidFill>
                   <a:srgbClr val="000000"/>
                 </a:solidFill>
@@ -2499,13 +2378,15 @@
                 <a:ea typeface="Arial" pitchFamily="34" charset="-122"/>
                 <a:cs typeface="Arial" pitchFamily="34" charset="-120"/>
               </a:rPr>
-              <a:t>“Love… is not glad about injustice, but rejoices in the truth. It bears all things, believes all things, hopes all things, endures all things.” </a:t>
-            </a:r>
-            <a:pPr algn="l" indent="0" marL="0">
+              <a:t>“Love… is not glad about injustice but rejoices in the truth. It bears all things, believes all things, hopes all things, endures all things.” </a:t>
+            </a:r>
+          </a:p>
+          <a:p>
+            <a:pPr marL="0" indent="0" algn="l">
               <a:buNone/>
             </a:pPr>
             <a:r>
-              <a:rPr lang="en-US" sz="1400" b="1" dirty="0">
+              <a:rPr lang="en-US" b="1" dirty="0">
                 <a:solidFill>
                   <a:srgbClr val="000000"/>
                 </a:solidFill>
@@ -2515,7 +2396,7 @@
               </a:rPr>
               <a:t>(1 Corinthians 13:6–7)</a:t>
             </a:r>
-            <a:endParaRPr lang="en-US" sz="1600" dirty="0"/>
+            <a:endParaRPr lang="en-US" sz="2000" dirty="0"/>
           </a:p>
         </p:txBody>
       </p:sp>
@@ -2540,11 +2421,11 @@
           <a:bodyPr wrap="square" lIns="0" tIns="0" rIns="0" bIns="0" rtlCol="0" anchor="t"/>
           <a:lstStyle/>
           <a:p>
-            <a:pPr algn="l" indent="0" marL="0">
+            <a:pPr marL="0" indent="0" algn="l">
               <a:buNone/>
             </a:pPr>
             <a:r>
-              <a:rPr lang="en-US" sz="1500" b="1" dirty="0">
+              <a:rPr lang="en-US" b="1" dirty="0">
                 <a:solidFill>
                   <a:srgbClr val="1F497D"/>
                 </a:solidFill>
@@ -2554,11 +2435,8 @@
               </a:rPr>
               <a:t>Biblical love is never separated from truth. </a:t>
             </a:r>
-            <a:pPr algn="l" indent="0" marL="0">
-              <a:buNone/>
-            </a:pPr>
-            <a:r>
-              <a:rPr lang="en-US" sz="1450" dirty="0">
+            <a:r>
+              <a:rPr lang="en-US" dirty="0">
                 <a:solidFill>
                   <a:srgbClr val="000000"/>
                 </a:solidFill>
@@ -2566,29 +2444,29 @@
                 <a:ea typeface="Arial" pitchFamily="34" charset="-122"/>
                 <a:cs typeface="Arial" pitchFamily="34" charset="-120"/>
               </a:rPr>
-              <a:t>It seeks a person’s ultimate good — not merely their immediate comfort. Those are often the same. Sometimes they are opposites.</a:t>
-            </a:r>
-            <a:endParaRPr lang="en-US" sz="1600" dirty="0"/>
+              <a:t>It seeks a person’s ultimate good, not merely their immediate comfort. Those are often the same. Sometimes they are opposites.</a:t>
+            </a:r>
+            <a:endParaRPr lang="en-US" sz="2000" dirty="0"/>
           </a:p>
         </p:txBody>
       </p:sp>
       <p:pic>
         <p:nvPicPr>
-          <p:cNvPr id="6" name="imgE" descr="empathy.png">    </p:cNvPr>
+          <p:cNvPr id="6" name="imgE" descr="empathy.png"/>
           <p:cNvPicPr>
             <a:picLocks noChangeAspect="1"/>
           </p:cNvPicPr>
           <p:nvPr/>
         </p:nvPicPr>
         <p:blipFill>
-          <a:blip r:embed="rId1"/>
+          <a:blip r:embed="rId3"/>
           <a:stretch>
             <a:fillRect/>
           </a:stretch>
         </p:blipFill>
         <p:spPr>
           <a:xfrm>
-            <a:off x="502920" y="2926080"/>
+            <a:off x="502920" y="2834640"/>
             <a:ext cx="3703320" cy="2697480"/>
           </a:xfrm>
           <a:prstGeom prst="rect">
@@ -2598,21 +2476,21 @@
       </p:pic>
       <p:pic>
         <p:nvPicPr>
-          <p:cNvPr id="7" name="imgS" descr="sympathy.png">    </p:cNvPr>
+          <p:cNvPr id="7" name="imgS" descr="sympathy.png"/>
           <p:cNvPicPr>
             <a:picLocks noChangeAspect="1"/>
           </p:cNvPicPr>
           <p:nvPr/>
         </p:nvPicPr>
         <p:blipFill>
-          <a:blip r:embed="rId2"/>
+          <a:blip r:embed="rId4"/>
           <a:stretch>
             <a:fillRect/>
           </a:stretch>
         </p:blipFill>
         <p:spPr>
           <a:xfrm>
-            <a:off x="4572000" y="2926080"/>
+            <a:off x="4572000" y="2834640"/>
             <a:ext cx="3703320" cy="2697480"/>
           </a:xfrm>
           <a:prstGeom prst="rect">
@@ -2641,11 +2519,11 @@
           <a:bodyPr wrap="square" lIns="0" tIns="0" rIns="0" bIns="0" rtlCol="0" anchor="t"/>
           <a:lstStyle/>
           <a:p>
-            <a:pPr algn="l" indent="0" marL="0">
+            <a:pPr marL="0" indent="0" algn="l">
               <a:buNone/>
             </a:pPr>
             <a:r>
-              <a:rPr lang="en-US" sz="1450" b="1" dirty="0">
+              <a:rPr lang="en-US" sz="2000" b="1" dirty="0">
                 <a:solidFill>
                   <a:srgbClr val="B0413E"/>
                 </a:solidFill>
@@ -2655,11 +2533,8 @@
               </a:rPr>
               <a:t>Empathy </a:t>
             </a:r>
-            <a:pPr algn="l" indent="0" marL="0">
-              <a:buNone/>
-            </a:pPr>
-            <a:r>
-              <a:rPr lang="en-US" sz="1350" dirty="0">
+            <a:r>
+              <a:rPr lang="en-US" dirty="0">
                 <a:solidFill>
                   <a:srgbClr val="000000"/>
                 </a:solidFill>
@@ -2667,13 +2542,33 @@
                 <a:ea typeface="Arial" pitchFamily="34" charset="-122"/>
                 <a:cs typeface="Arial" pitchFamily="34" charset="-120"/>
               </a:rPr>
-              <a:t>can mean climbing into the pit — feeling exactly what they feel, losing the ground to stand on.   </a:t>
-            </a:r>
-            <a:pPr algn="l" indent="0" marL="0">
-              <a:buNone/>
-            </a:pPr>
-            <a:r>
-              <a:rPr lang="en-US" sz="1450" b="1" dirty="0">
+              <a:t>can mean climbing into the pit </a:t>
+            </a:r>
+            <a:r>
+              <a:rPr lang="en-US" dirty="0">
+                <a:solidFill>
+                  <a:srgbClr val="000000"/>
+                </a:solidFill>
+                <a:latin typeface="Arial" pitchFamily="34" charset="0"/>
+                <a:ea typeface="Arial" pitchFamily="34" charset="-122"/>
+                <a:cs typeface="Arial" pitchFamily="34" charset="-120"/>
+                <a:sym typeface="Wingdings" pitchFamily="2" charset="2"/>
+              </a:rPr>
+              <a:t></a:t>
+            </a:r>
+            <a:r>
+              <a:rPr lang="en-US" dirty="0">
+                <a:solidFill>
+                  <a:srgbClr val="000000"/>
+                </a:solidFill>
+                <a:latin typeface="Arial" pitchFamily="34" charset="0"/>
+                <a:ea typeface="Arial" pitchFamily="34" charset="-122"/>
+                <a:cs typeface="Arial" pitchFamily="34" charset="-120"/>
+              </a:rPr>
+              <a:t> feeling exactly what they feel, losing the ground to stand on.   </a:t>
+            </a:r>
+            <a:r>
+              <a:rPr lang="en-US" sz="2000" b="1" dirty="0">
                 <a:solidFill>
                   <a:srgbClr val="4E7B4E"/>
                 </a:solidFill>
@@ -2683,11 +2578,8 @@
               </a:rPr>
               <a:t>Sympathy / love </a:t>
             </a:r>
-            <a:pPr algn="l" indent="0" marL="0">
-              <a:buNone/>
-            </a:pPr>
-            <a:r>
-              <a:rPr lang="en-US" sz="1350" dirty="0">
+            <a:r>
+              <a:rPr lang="en-US" dirty="0">
                 <a:solidFill>
                   <a:srgbClr val="000000"/>
                 </a:solidFill>
@@ -2695,9 +2587,32 @@
                 <a:ea typeface="Arial" pitchFamily="34" charset="-122"/>
                 <a:cs typeface="Arial" pitchFamily="34" charset="-120"/>
               </a:rPr>
-              <a:t>keeps one foot on solid ground to pull the other person out. Christ sympathizes fully — yet without sin (Heb 4:15).</a:t>
-            </a:r>
-            <a:endParaRPr lang="en-US" sz="1600" dirty="0"/>
+              <a:t>keeps one foot on solid ground to pull the other person out. Christ sympathizes fully </a:t>
+            </a:r>
+            <a:r>
+              <a:rPr lang="en-US" dirty="0">
+                <a:solidFill>
+                  <a:srgbClr val="000000"/>
+                </a:solidFill>
+                <a:latin typeface="Arial" pitchFamily="34" charset="0"/>
+                <a:ea typeface="Arial" pitchFamily="34" charset="-122"/>
+                <a:cs typeface="Arial" pitchFamily="34" charset="-120"/>
+                <a:sym typeface="Wingdings" pitchFamily="2" charset="2"/>
+              </a:rPr>
+              <a:t></a:t>
+            </a:r>
+            <a:r>
+              <a:rPr lang="en-US" dirty="0">
+                <a:solidFill>
+                  <a:srgbClr val="000000"/>
+                </a:solidFill>
+                <a:latin typeface="Arial" pitchFamily="34" charset="0"/>
+                <a:ea typeface="Arial" pitchFamily="34" charset="-122"/>
+                <a:cs typeface="Arial" pitchFamily="34" charset="-120"/>
+              </a:rPr>
+              <a:t> yet without sin (Heb 4:15).</a:t>
+            </a:r>
+            <a:endParaRPr lang="en-US" sz="2400" dirty="0"/>
           </a:p>
         </p:txBody>
       </p:sp>
@@ -2715,26 +2630,26 @@
               <p:cTn id="2" dur="indefinite" nodeType="mainSeq">
                 <p:childTnLst>
                   <p:par>
-                    <p:cTn id="7" fill="hold">
+                    <p:cTn id="3" fill="hold">
                       <p:stCondLst>
                         <p:cond delay="indefinite"/>
                       </p:stCondLst>
                       <p:childTnLst>
                         <p:par>
-                          <p:cTn id="8" fill="hold">
+                          <p:cTn id="4" fill="hold">
                             <p:stCondLst>
                               <p:cond delay="0"/>
                             </p:stCondLst>
                             <p:childTnLst>
                               <p:par>
-                                <p:cTn id="3" presetID="42" presetClass="entr" presetSubtype="0" fill="hold" grpId="0" nodeType="clickEffect">
+                                <p:cTn id="5" presetID="42" presetClass="entr" presetSubtype="0" fill="hold" nodeType="clickEffect">
                                   <p:stCondLst>
                                     <p:cond delay="0"/>
                                   </p:stCondLst>
                                   <p:childTnLst>
                                     <p:set>
                                       <p:cBhvr>
-                                        <p:cTn id="4" dur="1" fill="hold">
+                                        <p:cTn id="6" dur="1" fill="hold">
                                           <p:stCondLst>
                                             <p:cond delay="0"/>
                                           </p:stCondLst>
@@ -2752,7 +2667,7 @@
                                     </p:set>
                                     <p:animEffect transition="in" filter="fade">
                                       <p:cBhvr>
-                                        <p:cTn id="5" dur="1000"/>
+                                        <p:cTn id="7" dur="1000"/>
                                         <p:tgtEl>
                                           <p:spTgt spid="4"/>
                                         </p:tgtEl>
@@ -2760,7 +2675,7 @@
                                     </p:animEffect>
                                     <p:anim calcmode="lin" valueType="num">
                                       <p:cBhvr>
-                                        <p:cTn id="6" dur="1000" fill="hold"/>
+                                        <p:cTn id="8" dur="1000" fill="hold"/>
                                         <p:tgtEl>
                                           <p:spTgt spid="4"/>
                                         </p:tgtEl>
@@ -2791,26 +2706,26 @@
                     </p:cTn>
                   </p:par>
                   <p:par>
-                    <p:cTn id="13" fill="hold">
+                    <p:cTn id="9" fill="hold">
                       <p:stCondLst>
                         <p:cond delay="indefinite"/>
                       </p:stCondLst>
                       <p:childTnLst>
                         <p:par>
-                          <p:cTn id="14" fill="hold">
+                          <p:cTn id="10" fill="hold">
                             <p:stCondLst>
                               <p:cond delay="0"/>
                             </p:stCondLst>
                             <p:childTnLst>
                               <p:par>
-                                <p:cTn id="9" presetID="42" presetClass="entr" presetSubtype="0" fill="hold" grpId="0" nodeType="clickEffect">
+                                <p:cTn id="11" presetID="42" presetClass="entr" presetSubtype="0" fill="hold" nodeType="clickEffect">
                                   <p:stCondLst>
                                     <p:cond delay="0"/>
                                   </p:stCondLst>
                                   <p:childTnLst>
                                     <p:set>
                                       <p:cBhvr>
-                                        <p:cTn id="10" dur="1" fill="hold">
+                                        <p:cTn id="12" dur="1" fill="hold">
                                           <p:stCondLst>
                                             <p:cond delay="0"/>
                                           </p:stCondLst>
@@ -2828,7 +2743,7 @@
                                     </p:set>
                                     <p:animEffect transition="in" filter="fade">
                                       <p:cBhvr>
-                                        <p:cTn id="11" dur="1000"/>
+                                        <p:cTn id="13" dur="1000"/>
                                         <p:tgtEl>
                                           <p:spTgt spid="5"/>
                                         </p:tgtEl>
@@ -2836,7 +2751,7 @@
                                     </p:animEffect>
                                     <p:anim calcmode="lin" valueType="num">
                                       <p:cBhvr>
-                                        <p:cTn id="12" dur="1000" fill="hold"/>
+                                        <p:cTn id="14" dur="1000" fill="hold"/>
                                         <p:tgtEl>
                                           <p:spTgt spid="5"/>
                                         </p:tgtEl>
@@ -2867,26 +2782,26 @@
                     </p:cTn>
                   </p:par>
                   <p:par>
-                    <p:cTn id="27" fill="hold">
+                    <p:cTn id="15" fill="hold">
                       <p:stCondLst>
                         <p:cond delay="indefinite"/>
                       </p:stCondLst>
                       <p:childTnLst>
                         <p:par>
-                          <p:cTn id="28" fill="hold">
+                          <p:cTn id="16" fill="hold">
                             <p:stCondLst>
                               <p:cond delay="0"/>
                             </p:stCondLst>
                             <p:childTnLst>
                               <p:par>
-                                <p:cTn id="15" presetID="42" presetClass="entr" presetSubtype="0" fill="hold" grpId="0" nodeType="clickEffect">
+                                <p:cTn id="17" presetID="42" presetClass="entr" presetSubtype="0" fill="hold" nodeType="clickEffect">
                                   <p:stCondLst>
                                     <p:cond delay="0"/>
                                   </p:stCondLst>
                                   <p:childTnLst>
                                     <p:set>
                                       <p:cBhvr>
-                                        <p:cTn id="16" dur="1" fill="hold">
+                                        <p:cTn id="18" dur="1" fill="hold">
                                           <p:stCondLst>
                                             <p:cond delay="0"/>
                                           </p:stCondLst>
@@ -2904,7 +2819,7 @@
                                     </p:set>
                                     <p:animEffect transition="in" filter="fade">
                                       <p:cBhvr>
-                                        <p:cTn id="17" dur="1000"/>
+                                        <p:cTn id="19" dur="1000"/>
                                         <p:tgtEl>
                                           <p:spTgt spid="6"/>
                                         </p:tgtEl>
@@ -2912,7 +2827,7 @@
                                     </p:animEffect>
                                     <p:anim calcmode="lin" valueType="num">
                                       <p:cBhvr>
-                                        <p:cTn id="18" dur="1000" fill="hold"/>
+                                        <p:cTn id="20" dur="1000" fill="hold"/>
                                         <p:tgtEl>
                                           <p:spTgt spid="6"/>
                                         </p:tgtEl>
@@ -2937,14 +2852,14 @@
                                 </p:cTn>
                               </p:par>
                               <p:par>
-                                <p:cTn id="19" presetID="42" presetClass="entr" presetSubtype="0" fill="hold" grpId="0" nodeType="withEffect">
+                                <p:cTn id="21" presetID="42" presetClass="entr" presetSubtype="0" fill="hold" nodeType="withEffect">
                                   <p:stCondLst>
                                     <p:cond delay="0"/>
                                   </p:stCondLst>
                                   <p:childTnLst>
                                     <p:set>
                                       <p:cBhvr>
-                                        <p:cTn id="20" dur="1" fill="hold">
+                                        <p:cTn id="22" dur="1" fill="hold">
                                           <p:stCondLst>
                                             <p:cond delay="0"/>
                                           </p:stCondLst>
@@ -2962,7 +2877,7 @@
                                     </p:set>
                                     <p:animEffect transition="in" filter="fade">
                                       <p:cBhvr>
-                                        <p:cTn id="21" dur="1000"/>
+                                        <p:cTn id="23" dur="1000"/>
                                         <p:tgtEl>
                                           <p:spTgt spid="7"/>
                                         </p:tgtEl>
@@ -2970,7 +2885,7 @@
                                     </p:animEffect>
                                     <p:anim calcmode="lin" valueType="num">
                                       <p:cBhvr>
-                                        <p:cTn id="22" dur="1000" fill="hold"/>
+                                        <p:cTn id="24" dur="1000" fill="hold"/>
                                         <p:tgtEl>
                                           <p:spTgt spid="7"/>
                                         </p:tgtEl>
@@ -2995,14 +2910,14 @@
                                 </p:cTn>
                               </p:par>
                               <p:par>
-                                <p:cTn id="23" presetID="42" presetClass="entr" presetSubtype="0" fill="hold" grpId="0" nodeType="withEffect">
+                                <p:cTn id="25" presetID="42" presetClass="entr" presetSubtype="0" fill="hold" nodeType="withEffect">
                                   <p:stCondLst>
                                     <p:cond delay="0"/>
                                   </p:stCondLst>
                                   <p:childTnLst>
                                     <p:set>
                                       <p:cBhvr>
-                                        <p:cTn id="24" dur="1" fill="hold">
+                                        <p:cTn id="26" dur="1" fill="hold">
                                           <p:stCondLst>
                                             <p:cond delay="0"/>
                                           </p:stCondLst>
@@ -3020,7 +2935,7 @@
                                     </p:set>
                                     <p:animEffect transition="in" filter="fade">
                                       <p:cBhvr>
-                                        <p:cTn id="25" dur="1000"/>
+                                        <p:cTn id="27" dur="1000"/>
                                         <p:tgtEl>
                                           <p:spTgt spid="8"/>
                                         </p:tgtEl>
@@ -3028,7 +2943,7 @@
                                     </p:animEffect>
                                     <p:anim calcmode="lin" valueType="num">
                                       <p:cBhvr>
-                                        <p:cTn id="26" dur="1000" fill="hold"/>
+                                        <p:cTn id="28" dur="1000" fill="hold"/>
                                         <p:tgtEl>
                                           <p:spTgt spid="8"/>
                                         </p:tgtEl>
@@ -3121,7 +3036,7 @@
           <a:bodyPr wrap="square" lIns="0" tIns="0" rIns="0" bIns="0" rtlCol="0" anchor="t"/>
           <a:lstStyle/>
           <a:p>
-            <a:pPr algn="l" indent="0" marL="0">
+            <a:pPr marL="0" indent="0" algn="l">
               <a:buNone/>
             </a:pPr>
             <a:r>
@@ -3160,11 +3075,11 @@
           <a:bodyPr wrap="square" lIns="0" tIns="0" rIns="0" bIns="0" rtlCol="0" anchor="t"/>
           <a:lstStyle/>
           <a:p>
-            <a:pPr algn="l" indent="0" marL="0">
+            <a:pPr marL="0" indent="0" algn="l">
               <a:buNone/>
             </a:pPr>
             <a:r>
-              <a:rPr lang="en-US" sz="1300" b="1" dirty="0">
+              <a:rPr lang="en-US" sz="2000" b="1" dirty="0">
                 <a:solidFill>
                   <a:srgbClr val="4F81BD"/>
                 </a:solidFill>
@@ -3172,9 +3087,32 @@
                 <a:ea typeface="Arial" pitchFamily="34" charset="-122"/>
                 <a:cs typeface="Arial" pitchFamily="34" charset="-120"/>
               </a:rPr>
-              <a:t>Feelings made the final authority — Eden’s move, repeated</a:t>
-            </a:r>
-            <a:endParaRPr lang="en-US" sz="1600" dirty="0"/>
+              <a:t>Feelings made the final authority </a:t>
+            </a:r>
+            <a:r>
+              <a:rPr lang="en-US" sz="2000" b="1" dirty="0">
+                <a:solidFill>
+                  <a:srgbClr val="4F81BD"/>
+                </a:solidFill>
+                <a:latin typeface="Arial" pitchFamily="34" charset="0"/>
+                <a:ea typeface="Arial" pitchFamily="34" charset="-122"/>
+                <a:cs typeface="Arial" pitchFamily="34" charset="-120"/>
+                <a:sym typeface="Wingdings" pitchFamily="2" charset="2"/>
+              </a:rPr>
+              <a:t></a:t>
+            </a:r>
+            <a:r>
+              <a:rPr lang="en-US" sz="2000" b="1" dirty="0">
+                <a:solidFill>
+                  <a:srgbClr val="4F81BD"/>
+                </a:solidFill>
+                <a:latin typeface="Arial" pitchFamily="34" charset="0"/>
+                <a:ea typeface="Arial" pitchFamily="34" charset="-122"/>
+                <a:cs typeface="Arial" pitchFamily="34" charset="-120"/>
+              </a:rPr>
+              <a:t> Eden’s move, repeated</a:t>
+            </a:r>
+            <a:endParaRPr lang="en-US" sz="2800" dirty="0"/>
           </a:p>
         </p:txBody>
       </p:sp>
@@ -3187,7 +3125,7 @@
         <p:spPr>
           <a:xfrm>
             <a:off x="365760" y="1143000"/>
-            <a:ext cx="8412480" cy="1005840"/>
+            <a:ext cx="8412480" cy="1232180"/>
           </a:xfrm>
           <a:prstGeom prst="rect">
             <a:avLst/>
@@ -3199,11 +3137,11 @@
           <a:bodyPr wrap="square" lIns="0" tIns="0" rIns="0" bIns="0" rtlCol="0" anchor="t"/>
           <a:lstStyle/>
           <a:p>
-            <a:pPr algn="l" indent="0" marL="0">
+            <a:pPr marL="0" indent="0" algn="l">
               <a:buNone/>
             </a:pPr>
             <a:r>
-              <a:rPr lang="en-US" sz="1600" b="1" dirty="0">
+              <a:rPr lang="en-US" sz="2000" b="1" dirty="0">
                 <a:solidFill>
                   <a:srgbClr val="B0413E"/>
                 </a:solidFill>
@@ -3213,11 +3151,25 @@
               </a:rPr>
               <a:t>The pattern:  </a:t>
             </a:r>
-            <a:pPr algn="l" indent="0" marL="0">
+            <a:r>
+              <a:rPr lang="en-US" sz="2000" b="1" i="1" dirty="0">
+                <a:solidFill>
+                  <a:srgbClr val="000000"/>
+                </a:solidFill>
+                <a:latin typeface="Arial" pitchFamily="34" charset="0"/>
+                <a:ea typeface="Arial" pitchFamily="34" charset="-122"/>
+                <a:cs typeface="Arial" pitchFamily="34" charset="-120"/>
+              </a:rPr>
+              <a:t>“If you really cared about me, you would enable my choice.”</a:t>
+            </a:r>
+            <a:endParaRPr lang="en-US" sz="2000" dirty="0"/>
+          </a:p>
+          <a:p>
+            <a:pPr marL="0" indent="0" algn="l">
               <a:buNone/>
             </a:pPr>
             <a:r>
-              <a:rPr lang="en-US" sz="1700" b="1" i="1" dirty="0">
+              <a:rPr lang="en-US" dirty="0">
                 <a:solidFill>
                   <a:srgbClr val="000000"/>
                 </a:solidFill>
@@ -3225,29 +3177,9 @@
                 <a:ea typeface="Arial" pitchFamily="34" charset="-122"/>
                 <a:cs typeface="Arial" pitchFamily="34" charset="-120"/>
               </a:rPr>
-              <a:t>“If you really cared about me, you would enable my choice.”</a:t>
-            </a:r>
-            <a:pPr algn="l" indent="0" marL="0">
-              <a:buNone/>
-            </a:pPr>
-            <a:endParaRPr lang="en-US" sz="1600" dirty="0"/>
-          </a:p>
-          <a:p>
-            <a:pPr algn="l" indent="0" marL="0">
-              <a:buNone/>
-            </a:pPr>
-            <a:r>
-              <a:rPr lang="en-US" sz="1450" dirty="0">
-                <a:solidFill>
-                  <a:srgbClr val="000000"/>
-                </a:solidFill>
-                <a:latin typeface="Arial" pitchFamily="34" charset="0"/>
-                <a:ea typeface="Arial" pitchFamily="34" charset="-122"/>
-                <a:cs typeface="Arial" pitchFamily="34" charset="-120"/>
-              </a:rPr>
               <a:t>The discussion is moved off what is right and onto what causes the least emotional discomfort. Guilt becomes the lever; feeling becomes the final court.</a:t>
             </a:r>
-            <a:endParaRPr lang="en-US" sz="1600" dirty="0"/>
+            <a:endParaRPr lang="en-US" sz="2000" dirty="0"/>
           </a:p>
         </p:txBody>
       </p:sp>
@@ -3259,7 +3191,7 @@
         </p:nvSpPr>
         <p:spPr>
           <a:xfrm>
-            <a:off x="365760" y="2377440"/>
+            <a:off x="365760" y="2592350"/>
             <a:ext cx="8412480" cy="914400"/>
           </a:xfrm>
           <a:prstGeom prst="rect">
@@ -3272,11 +3204,11 @@
           <a:bodyPr wrap="square" lIns="0" tIns="0" rIns="0" bIns="0" rtlCol="0" anchor="t"/>
           <a:lstStyle/>
           <a:p>
-            <a:pPr algn="l" indent="0" marL="0">
+            <a:pPr marL="0" indent="0" algn="l">
               <a:buNone/>
             </a:pPr>
             <a:r>
-              <a:rPr lang="en-US" sz="1500" b="1" dirty="0">
+              <a:rPr lang="en-US" b="1" dirty="0">
                 <a:solidFill>
                   <a:srgbClr val="1F497D"/>
                 </a:solidFill>
@@ -3286,11 +3218,8 @@
               </a:rPr>
               <a:t>Notice it is Eden’s move exactly: </a:t>
             </a:r>
-            <a:pPr algn="l" indent="0" marL="0">
-              <a:buNone/>
-            </a:pPr>
-            <a:r>
-              <a:rPr lang="en-US" sz="1450" dirty="0">
+            <a:r>
+              <a:rPr lang="en-US" dirty="0">
                 <a:solidFill>
                   <a:srgbClr val="000000"/>
                 </a:solidFill>
@@ -3298,9 +3227,32 @@
                 <a:ea typeface="Arial" pitchFamily="34" charset="-122"/>
                 <a:cs typeface="Arial" pitchFamily="34" charset="-120"/>
               </a:rPr>
-              <a:t>the standard shifts from “What did God say?” to “What will make the pain stop?”  Compassion, cut from truth, becomes a tool of control — and often the one applying pressure sincerely believes it is love.</a:t>
-            </a:r>
-            <a:endParaRPr lang="en-US" sz="1600" dirty="0"/>
+              <a:t>the standard shifts from “What did God say?” to “What will make the pain stop?”  Compassion, cut from truth, becomes a tool of control </a:t>
+            </a:r>
+            <a:r>
+              <a:rPr lang="en-US" dirty="0">
+                <a:solidFill>
+                  <a:srgbClr val="000000"/>
+                </a:solidFill>
+                <a:latin typeface="Arial" pitchFamily="34" charset="0"/>
+                <a:ea typeface="Arial" pitchFamily="34" charset="-122"/>
+                <a:cs typeface="Arial" pitchFamily="34" charset="-120"/>
+                <a:sym typeface="Wingdings" pitchFamily="2" charset="2"/>
+              </a:rPr>
+              <a:t></a:t>
+            </a:r>
+            <a:r>
+              <a:rPr lang="en-US" dirty="0">
+                <a:solidFill>
+                  <a:srgbClr val="000000"/>
+                </a:solidFill>
+                <a:latin typeface="Arial" pitchFamily="34" charset="0"/>
+                <a:ea typeface="Arial" pitchFamily="34" charset="-122"/>
+                <a:cs typeface="Arial" pitchFamily="34" charset="-120"/>
+              </a:rPr>
+              <a:t> and often the one applying pressure sincerely believes it is love.</a:t>
+            </a:r>
+            <a:endParaRPr lang="en-US" sz="2000" dirty="0"/>
           </a:p>
         </p:txBody>
       </p:sp>
@@ -3312,7 +3264,7 @@
         </p:nvSpPr>
         <p:spPr>
           <a:xfrm>
-            <a:off x="365760" y="3429000"/>
+            <a:off x="365760" y="3723920"/>
             <a:ext cx="8412480" cy="1280160"/>
           </a:xfrm>
           <a:prstGeom prst="rect">
@@ -3325,11 +3277,11 @@
           <a:bodyPr wrap="square" lIns="0" tIns="0" rIns="0" bIns="0" rtlCol="0" anchor="t"/>
           <a:lstStyle/>
           <a:p>
-            <a:pPr algn="l" indent="0" marL="0">
+            <a:pPr marL="0" indent="0" algn="l">
               <a:buNone/>
             </a:pPr>
             <a:r>
-              <a:rPr lang="en-US" sz="1450" b="1" dirty="0">
+              <a:rPr lang="en-US" b="1" dirty="0">
                 <a:solidFill>
                   <a:srgbClr val="000000"/>
                 </a:solidFill>
@@ -3340,11 +3292,8 @@
               <a:t>But the God of all compassion is not like this:
 </a:t>
             </a:r>
-            <a:pPr algn="l" indent="0" marL="0">
-              <a:buNone/>
-            </a:pPr>
-            <a:r>
-              <a:rPr lang="en-US" sz="1400" dirty="0">
+            <a:r>
+              <a:rPr lang="en-US" dirty="0">
                 <a:solidFill>
                   <a:srgbClr val="000000"/>
                 </a:solidFill>
@@ -3352,13 +3301,55 @@
                 <a:ea typeface="Arial" pitchFamily="34" charset="-122"/>
                 <a:cs typeface="Arial" pitchFamily="34" charset="-120"/>
               </a:rPr>
-              <a:t>•  He is “compassionate and gracious, slow to anger” (Ex 34:6) — </a:t>
-            </a:r>
-            <a:pPr algn="l" indent="0" marL="0">
-              <a:buNone/>
-            </a:pPr>
-            <a:r>
-              <a:rPr lang="en-US" sz="1400" b="1" i="1" dirty="0">
+              <a:t>•  He is </a:t>
+            </a:r>
+            <a:r>
+              <a:rPr lang="en-US" i="1" dirty="0">
+                <a:solidFill>
+                  <a:srgbClr val="000000"/>
+                </a:solidFill>
+                <a:latin typeface="Arial" pitchFamily="34" charset="0"/>
+                <a:ea typeface="Arial" pitchFamily="34" charset="-122"/>
+                <a:cs typeface="Arial" pitchFamily="34" charset="-120"/>
+              </a:rPr>
+              <a:t>“compassionate and gracious, slow to anger” </a:t>
+            </a:r>
+            <a:r>
+              <a:rPr lang="en-US" dirty="0">
+                <a:solidFill>
+                  <a:srgbClr val="000000"/>
+                </a:solidFill>
+                <a:latin typeface="Arial" pitchFamily="34" charset="0"/>
+                <a:ea typeface="Arial" pitchFamily="34" charset="-122"/>
+                <a:cs typeface="Arial" pitchFamily="34" charset="-120"/>
+              </a:rPr>
+              <a:t>(Ex 34:6) </a:t>
+            </a:r>
+            <a:r>
+              <a:rPr lang="en-US" dirty="0">
+                <a:solidFill>
+                  <a:srgbClr val="000000"/>
+                </a:solidFill>
+                <a:latin typeface="Arial" pitchFamily="34" charset="0"/>
+                <a:ea typeface="Arial" pitchFamily="34" charset="-122"/>
+                <a:cs typeface="Arial" pitchFamily="34" charset="-120"/>
+                <a:sym typeface="Wingdings" pitchFamily="2" charset="2"/>
+              </a:rPr>
+              <a:t></a:t>
+            </a:r>
+            <a:r>
+              <a:rPr lang="en-US" dirty="0">
+                <a:solidFill>
+                  <a:srgbClr val="000000"/>
+                </a:solidFill>
+                <a:latin typeface="Arial" pitchFamily="34" charset="0"/>
+                <a:ea typeface="Arial" pitchFamily="34" charset="-122"/>
+                <a:cs typeface="Arial" pitchFamily="34" charset="-120"/>
+              </a:rPr>
+              <a:t> </a:t>
+            </a:r>
+            <a:r>
+              <a:rPr lang="en-US" b="1" i="1" dirty="0">
                 <a:solidFill>
                   <a:srgbClr val="1F497D"/>
                 </a:solidFill>
@@ -3368,11 +3359,8 @@
               </a:rPr>
               <a:t>and</a:t>
             </a:r>
-            <a:pPr algn="l" indent="0" marL="0">
-              <a:buNone/>
-            </a:pPr>
-            <a:r>
-              <a:rPr lang="en-US" sz="1400" dirty="0">
+            <a:r>
+              <a:rPr lang="en-US" dirty="0">
                 <a:solidFill>
                   <a:srgbClr val="000000"/>
                 </a:solidFill>
@@ -3382,23 +3370,9 @@
               </a:rPr>
               <a:t>
 •  He disciplines the son he loves (Heb 12:6)
-</a:t>
-            </a:r>
-            <a:pPr algn="l" indent="0" marL="0">
-              <a:buNone/>
-            </a:pPr>
-            <a:r>
-              <a:rPr lang="en-US" sz="1400" dirty="0">
-                <a:solidFill>
-                  <a:srgbClr val="000000"/>
-                </a:solidFill>
-                <a:latin typeface="Arial" pitchFamily="34" charset="0"/>
-                <a:ea typeface="Arial" pitchFamily="34" charset="-122"/>
-                <a:cs typeface="Arial" pitchFamily="34" charset="-120"/>
-              </a:rPr>
-              <a:t>•  He calls to repentance precisely because he is patient (2 Pet 3:9; Rom 2:4)</a:t>
-            </a:r>
-            <a:endParaRPr lang="en-US" sz="1600" dirty="0"/>
+•  He calls to repentance precisely because he is patient (2 Pet 3:9; Rom 2:4)</a:t>
+            </a:r>
+            <a:endParaRPr lang="en-US" sz="2000" dirty="0"/>
           </a:p>
         </p:txBody>
       </p:sp>
@@ -3410,7 +3384,7 @@
         </p:nvSpPr>
         <p:spPr>
           <a:xfrm>
-            <a:off x="365760" y="4846320"/>
+            <a:off x="365760" y="5221250"/>
             <a:ext cx="8412480" cy="1280160"/>
           </a:xfrm>
           <a:prstGeom prst="rect">
@@ -3423,11 +3397,11 @@
           <a:bodyPr wrap="square" lIns="0" tIns="0" rIns="0" bIns="0" rtlCol="0" anchor="t"/>
           <a:lstStyle/>
           <a:p>
-            <a:pPr algn="l" indent="0" marL="0">
+            <a:pPr marL="0" indent="0" algn="l">
               <a:buNone/>
             </a:pPr>
             <a:r>
-              <a:rPr lang="en-US" sz="1600" b="1" dirty="0">
+              <a:rPr lang="en-US" sz="2000" b="1" dirty="0">
                 <a:solidFill>
                   <a:srgbClr val="1F497D"/>
                 </a:solidFill>
@@ -3437,11 +3411,8 @@
               </a:rPr>
               <a:t>Real compassion sometimes says the hard thing. </a:t>
             </a:r>
-            <a:pPr algn="l" indent="0" marL="0">
-              <a:buNone/>
-            </a:pPr>
-            <a:r>
-              <a:rPr lang="en-US" sz="1450" dirty="0">
+            <a:r>
+              <a:rPr lang="en-US" dirty="0">
                 <a:solidFill>
                   <a:srgbClr val="000000"/>
                 </a:solidFill>
@@ -3451,7 +3422,7 @@
               </a:rPr>
               <a:t>The surgeon who refuses to operate because the patient fears the knife is not kind. A love that will not risk the other person’s displeasure has already stopped seeking their good.</a:t>
             </a:r>
-            <a:endParaRPr lang="en-US" sz="1600" dirty="0"/>
+            <a:endParaRPr lang="en-US" sz="2000" dirty="0"/>
           </a:p>
         </p:txBody>
       </p:sp>
@@ -3469,26 +3440,26 @@
               <p:cTn id="2" dur="indefinite" nodeType="mainSeq">
                 <p:childTnLst>
                   <p:par>
-                    <p:cTn id="7" fill="hold">
+                    <p:cTn id="3" fill="hold">
                       <p:stCondLst>
                         <p:cond delay="indefinite"/>
                       </p:stCondLst>
                       <p:childTnLst>
                         <p:par>
-                          <p:cTn id="8" fill="hold">
+                          <p:cTn id="4" fill="hold">
                             <p:stCondLst>
                               <p:cond delay="0"/>
                             </p:stCondLst>
                             <p:childTnLst>
                               <p:par>
-                                <p:cTn id="3" presetID="42" presetClass="entr" presetSubtype="0" fill="hold" grpId="0" nodeType="clickEffect">
+                                <p:cTn id="5" presetID="42" presetClass="entr" presetSubtype="0" fill="hold" nodeType="clickEffect">
                                   <p:stCondLst>
                                     <p:cond delay="0"/>
                                   </p:stCondLst>
                                   <p:childTnLst>
                                     <p:set>
                                       <p:cBhvr>
-                                        <p:cTn id="4" dur="1" fill="hold">
+                                        <p:cTn id="6" dur="1" fill="hold">
                                           <p:stCondLst>
                                             <p:cond delay="0"/>
                                           </p:stCondLst>
@@ -3506,7 +3477,7 @@
                                     </p:set>
                                     <p:animEffect transition="in" filter="fade">
                                       <p:cBhvr>
-                                        <p:cTn id="5" dur="1000"/>
+                                        <p:cTn id="7" dur="1000"/>
                                         <p:tgtEl>
                                           <p:spTgt spid="4"/>
                                         </p:tgtEl>
@@ -3514,7 +3485,7 @@
                                     </p:animEffect>
                                     <p:anim calcmode="lin" valueType="num">
                                       <p:cBhvr>
-                                        <p:cTn id="6" dur="1000" fill="hold"/>
+                                        <p:cTn id="8" dur="1000" fill="hold"/>
                                         <p:tgtEl>
                                           <p:spTgt spid="4"/>
                                         </p:tgtEl>
@@ -3545,26 +3516,26 @@
                     </p:cTn>
                   </p:par>
                   <p:par>
-                    <p:cTn id="13" fill="hold">
+                    <p:cTn id="9" fill="hold">
                       <p:stCondLst>
                         <p:cond delay="indefinite"/>
                       </p:stCondLst>
                       <p:childTnLst>
                         <p:par>
-                          <p:cTn id="14" fill="hold">
+                          <p:cTn id="10" fill="hold">
                             <p:stCondLst>
                               <p:cond delay="0"/>
                             </p:stCondLst>
                             <p:childTnLst>
                               <p:par>
-                                <p:cTn id="9" presetID="42" presetClass="entr" presetSubtype="0" fill="hold" grpId="0" nodeType="clickEffect">
+                                <p:cTn id="11" presetID="42" presetClass="entr" presetSubtype="0" fill="hold" nodeType="clickEffect">
                                   <p:stCondLst>
                                     <p:cond delay="0"/>
                                   </p:stCondLst>
                                   <p:childTnLst>
                                     <p:set>
                                       <p:cBhvr>
-                                        <p:cTn id="10" dur="1" fill="hold">
+                                        <p:cTn id="12" dur="1" fill="hold">
                                           <p:stCondLst>
                                             <p:cond delay="0"/>
                                           </p:stCondLst>
@@ -3582,7 +3553,7 @@
                                     </p:set>
                                     <p:animEffect transition="in" filter="fade">
                                       <p:cBhvr>
-                                        <p:cTn id="11" dur="1000"/>
+                                        <p:cTn id="13" dur="1000"/>
                                         <p:tgtEl>
                                           <p:spTgt spid="5"/>
                                         </p:tgtEl>
@@ -3590,7 +3561,7 @@
                                     </p:animEffect>
                                     <p:anim calcmode="lin" valueType="num">
                                       <p:cBhvr>
-                                        <p:cTn id="12" dur="1000" fill="hold"/>
+                                        <p:cTn id="14" dur="1000" fill="hold"/>
                                         <p:tgtEl>
                                           <p:spTgt spid="5"/>
                                         </p:tgtEl>
@@ -3621,26 +3592,26 @@
                     </p:cTn>
                   </p:par>
                   <p:par>
-                    <p:cTn id="19" fill="hold">
+                    <p:cTn id="15" fill="hold">
                       <p:stCondLst>
                         <p:cond delay="indefinite"/>
                       </p:stCondLst>
                       <p:childTnLst>
                         <p:par>
-                          <p:cTn id="20" fill="hold">
+                          <p:cTn id="16" fill="hold">
                             <p:stCondLst>
                               <p:cond delay="0"/>
                             </p:stCondLst>
                             <p:childTnLst>
                               <p:par>
-                                <p:cTn id="15" presetID="42" presetClass="entr" presetSubtype="0" fill="hold" grpId="0" nodeType="clickEffect">
+                                <p:cTn id="17" presetID="42" presetClass="entr" presetSubtype="0" fill="hold" nodeType="clickEffect">
                                   <p:stCondLst>
                                     <p:cond delay="0"/>
                                   </p:stCondLst>
                                   <p:childTnLst>
                                     <p:set>
                                       <p:cBhvr>
-                                        <p:cTn id="16" dur="1" fill="hold">
+                                        <p:cTn id="18" dur="1" fill="hold">
                                           <p:stCondLst>
                                             <p:cond delay="0"/>
                                           </p:stCondLst>
@@ -3658,7 +3629,7 @@
                                     </p:set>
                                     <p:animEffect transition="in" filter="fade">
                                       <p:cBhvr>
-                                        <p:cTn id="17" dur="1000"/>
+                                        <p:cTn id="19" dur="1000"/>
                                         <p:tgtEl>
                                           <p:spTgt spid="6"/>
                                         </p:tgtEl>
@@ -3666,7 +3637,7 @@
                                     </p:animEffect>
                                     <p:anim calcmode="lin" valueType="num">
                                       <p:cBhvr>
-                                        <p:cTn id="18" dur="1000" fill="hold"/>
+                                        <p:cTn id="20" dur="1000" fill="hold"/>
                                         <p:tgtEl>
                                           <p:spTgt spid="6"/>
                                         </p:tgtEl>
@@ -3697,26 +3668,26 @@
                     </p:cTn>
                   </p:par>
                   <p:par>
-                    <p:cTn id="25" fill="hold">
+                    <p:cTn id="21" fill="hold">
                       <p:stCondLst>
                         <p:cond delay="indefinite"/>
                       </p:stCondLst>
                       <p:childTnLst>
                         <p:par>
-                          <p:cTn id="26" fill="hold">
+                          <p:cTn id="22" fill="hold">
                             <p:stCondLst>
                               <p:cond delay="0"/>
                             </p:stCondLst>
                             <p:childTnLst>
                               <p:par>
-                                <p:cTn id="21" presetID="42" presetClass="entr" presetSubtype="0" fill="hold" grpId="0" nodeType="clickEffect">
+                                <p:cTn id="23" presetID="42" presetClass="entr" presetSubtype="0" fill="hold" nodeType="clickEffect">
                                   <p:stCondLst>
                                     <p:cond delay="0"/>
                                   </p:stCondLst>
                                   <p:childTnLst>
                                     <p:set>
                                       <p:cBhvr>
-                                        <p:cTn id="22" dur="1" fill="hold">
+                                        <p:cTn id="24" dur="1" fill="hold">
                                           <p:stCondLst>
                                             <p:cond delay="0"/>
                                           </p:stCondLst>
@@ -3734,7 +3705,7 @@
                                     </p:set>
                                     <p:animEffect transition="in" filter="fade">
                                       <p:cBhvr>
-                                        <p:cTn id="23" dur="1000"/>
+                                        <p:cTn id="25" dur="1000"/>
                                         <p:tgtEl>
                                           <p:spTgt spid="7"/>
                                         </p:tgtEl>
@@ -3742,7 +3713,7 @@
                                     </p:animEffect>
                                     <p:anim calcmode="lin" valueType="num">
                                       <p:cBhvr>
-                                        <p:cTn id="24" dur="1000" fill="hold"/>
+                                        <p:cTn id="26" dur="1000" fill="hold"/>
                                         <p:tgtEl>
                                           <p:spTgt spid="7"/>
                                         </p:tgtEl>
@@ -3835,7 +3806,7 @@
           <a:bodyPr wrap="square" lIns="0" tIns="0" rIns="0" bIns="0" rtlCol="0" anchor="t"/>
           <a:lstStyle/>
           <a:p>
-            <a:pPr algn="l" indent="0" marL="0">
+            <a:pPr marL="0" indent="0" algn="l">
               <a:buNone/>
             </a:pPr>
             <a:r>
@@ -3874,11 +3845,11 @@
           <a:bodyPr wrap="square" lIns="0" tIns="0" rIns="0" bIns="0" rtlCol="0" anchor="t"/>
           <a:lstStyle/>
           <a:p>
-            <a:pPr algn="l" indent="0" marL="0">
+            <a:pPr marL="0" indent="0" algn="l">
               <a:buNone/>
             </a:pPr>
             <a:r>
-              <a:rPr lang="en-US" sz="1300" b="1" dirty="0">
+              <a:rPr lang="en-US" sz="2000" b="1" dirty="0">
                 <a:solidFill>
                   <a:srgbClr val="4F81BD"/>
                 </a:solidFill>
@@ -3888,7 +3859,7 @@
               </a:rPr>
               <a:t>Compassion firmly anchored in truth</a:t>
             </a:r>
-            <a:endParaRPr lang="en-US" sz="1600" dirty="0"/>
+            <a:endParaRPr lang="en-US" sz="2800" dirty="0"/>
           </a:p>
         </p:txBody>
       </p:sp>
@@ -3900,8 +3871,8 @@
         </p:nvSpPr>
         <p:spPr>
           <a:xfrm>
-            <a:off x="365760" y="1188720"/>
-            <a:ext cx="8412480" cy="1005840"/>
+            <a:off x="365760" y="1024128"/>
+            <a:ext cx="8412480" cy="1307592"/>
           </a:xfrm>
           <a:prstGeom prst="rect">
             <a:avLst/>
@@ -3913,11 +3884,11 @@
           <a:bodyPr wrap="square" lIns="0" tIns="0" rIns="0" bIns="0" rtlCol="0" anchor="t"/>
           <a:lstStyle/>
           <a:p>
-            <a:pPr algn="l" indent="0" marL="0">
+            <a:pPr marL="0" indent="0" algn="l">
               <a:buNone/>
             </a:pPr>
             <a:r>
-              <a:rPr lang="en-US" sz="1600" b="1" dirty="0">
+              <a:rPr lang="en-US" sz="2400" b="1" dirty="0">
                 <a:solidFill>
                   <a:srgbClr val="B0413E"/>
                 </a:solidFill>
@@ -3927,11 +3898,8 @@
               </a:rPr>
               <a:t>The false choice to reject: </a:t>
             </a:r>
-            <a:pPr algn="l" indent="0" marL="0">
-              <a:buNone/>
-            </a:pPr>
-            <a:r>
-              <a:rPr lang="en-US" sz="1600" i="1" dirty="0">
+            <a:r>
+              <a:rPr lang="en-US" sz="2400" i="1" dirty="0">
                 <a:solidFill>
                   <a:srgbClr val="000000"/>
                 </a:solidFill>
@@ -3939,14 +3907,11 @@
                 <a:ea typeface="Arial" pitchFamily="34" charset="-122"/>
                 <a:cs typeface="Arial" pitchFamily="34" charset="-120"/>
               </a:rPr>
-              <a:t>“either be truthful, or be loving.”
+              <a:t>“either be truthful or be loving.”
 </a:t>
             </a:r>
-            <a:pPr algn="l" indent="0" marL="0">
-              <a:buNone/>
-            </a:pPr>
-            <a:r>
-              <a:rPr lang="en-US" sz="1450" dirty="0">
+            <a:r>
+              <a:rPr lang="en-US" sz="2000" dirty="0">
                 <a:solidFill>
                   <a:srgbClr val="000000"/>
                 </a:solidFill>
@@ -3954,9 +3919,32 @@
                 <a:ea typeface="Arial" pitchFamily="34" charset="-122"/>
                 <a:cs typeface="Arial" pitchFamily="34" charset="-120"/>
               </a:rPr>
-              <a:t>Scripture never offers that menu. The believer is not asked to pick a side; he is asked to hold both — with truth as the anchor and love as the manner.</a:t>
-            </a:r>
-            <a:endParaRPr lang="en-US" sz="1600" dirty="0"/>
+              <a:t>Scripture never offers that menu. The believer is not asked to pick a side; he is asked to hold both </a:t>
+            </a:r>
+            <a:r>
+              <a:rPr lang="en-US" sz="2000" dirty="0">
+                <a:solidFill>
+                  <a:srgbClr val="000000"/>
+                </a:solidFill>
+                <a:latin typeface="Arial" pitchFamily="34" charset="0"/>
+                <a:ea typeface="Arial" pitchFamily="34" charset="-122"/>
+                <a:cs typeface="Arial" pitchFamily="34" charset="-120"/>
+                <a:sym typeface="Wingdings" pitchFamily="2" charset="2"/>
+              </a:rPr>
+              <a:t> </a:t>
+            </a:r>
+            <a:r>
+              <a:rPr lang="en-US" sz="2000" dirty="0">
+                <a:solidFill>
+                  <a:srgbClr val="000000"/>
+                </a:solidFill>
+                <a:latin typeface="Arial" pitchFamily="34" charset="0"/>
+                <a:ea typeface="Arial" pitchFamily="34" charset="-122"/>
+                <a:cs typeface="Arial" pitchFamily="34" charset="-120"/>
+              </a:rPr>
+              <a:t>with truth as the anchor and love as the manner.</a:t>
+            </a:r>
+            <a:endParaRPr lang="en-US" sz="2400" dirty="0"/>
           </a:p>
         </p:txBody>
       </p:sp>
@@ -3981,11 +3969,11 @@
           <a:bodyPr wrap="square" lIns="0" tIns="0" rIns="0" bIns="0" rtlCol="0" anchor="t"/>
           <a:lstStyle/>
           <a:p>
-            <a:pPr algn="l" indent="0" marL="0">
+            <a:pPr marL="0" indent="0" algn="l">
               <a:buNone/>
             </a:pPr>
             <a:r>
-              <a:rPr lang="en-US" sz="1600" b="1" i="1" dirty="0">
+              <a:rPr lang="en-US" sz="2000" b="1" i="1" dirty="0">
                 <a:solidFill>
                   <a:srgbClr val="000000"/>
                 </a:solidFill>
@@ -3995,11 +3983,25 @@
               </a:rPr>
               <a:t>“speaking the truth in love, we will in all things grow up into Christ, who is the head.” </a:t>
             </a:r>
-            <a:pPr algn="l" indent="0" marL="0">
+            <a:r>
+              <a:rPr lang="en-US" b="1" dirty="0">
+                <a:solidFill>
+                  <a:srgbClr val="000000"/>
+                </a:solidFill>
+                <a:latin typeface="Arial" pitchFamily="34" charset="0"/>
+                <a:ea typeface="Arial" pitchFamily="34" charset="-122"/>
+                <a:cs typeface="Arial" pitchFamily="34" charset="-120"/>
+              </a:rPr>
+              <a:t>(Ephesians 4:15)</a:t>
+            </a:r>
+            <a:endParaRPr lang="en-US" sz="2000" dirty="0"/>
+          </a:p>
+          <a:p>
+            <a:pPr marL="0" indent="0" algn="l">
               <a:buNone/>
             </a:pPr>
             <a:r>
-              <a:rPr lang="en-US" sz="1500" b="1" dirty="0">
+              <a:rPr lang="en-US" dirty="0">
                 <a:solidFill>
                   <a:srgbClr val="000000"/>
                 </a:solidFill>
@@ -4007,29 +4009,9 @@
                 <a:ea typeface="Arial" pitchFamily="34" charset="-122"/>
                 <a:cs typeface="Arial" pitchFamily="34" charset="-120"/>
               </a:rPr>
-              <a:t>(Ephesians 4:15)</a:t>
-            </a:r>
-            <a:pPr algn="l" indent="0" marL="0">
-              <a:buNone/>
-            </a:pPr>
-            <a:endParaRPr lang="en-US" sz="1600" dirty="0"/>
-          </a:p>
-          <a:p>
-            <a:pPr algn="l" indent="0" marL="0">
-              <a:buNone/>
-            </a:pPr>
-            <a:r>
-              <a:rPr lang="en-US" sz="1400" dirty="0">
-                <a:solidFill>
-                  <a:srgbClr val="000000"/>
-                </a:solidFill>
-                <a:latin typeface="Arial" pitchFamily="34" charset="0"/>
-                <a:ea typeface="Arial" pitchFamily="34" charset="-122"/>
-                <a:cs typeface="Arial" pitchFamily="34" charset="-120"/>
-              </a:rPr>
               <a:t>Truth is what is spoken; love is how. Neither word is optional; neither is a hostage.</a:t>
             </a:r>
-            <a:endParaRPr lang="en-US" sz="1600" dirty="0"/>
+            <a:endParaRPr lang="en-US" sz="2000" dirty="0"/>
           </a:p>
         </p:txBody>
       </p:sp>
@@ -4054,6 +4036,13 @@
           </a:solidFill>
           <a:ln/>
         </p:spPr>
+        <p:txBody>
+          <a:bodyPr/>
+          <a:lstStyle/>
+          <a:p>
+            <a:endParaRPr lang="en-US"/>
+          </a:p>
+        </p:txBody>
       </p:sp>
       <p:sp>
         <p:nvSpPr>
@@ -4076,7 +4065,7 @@
           <a:bodyPr wrap="square" lIns="0" tIns="0" rIns="0" bIns="0" rtlCol="0" anchor="ctr"/>
           <a:lstStyle/>
           <a:p>
-            <a:pPr algn="ctr" indent="0" marL="0">
+            <a:pPr marL="0" indent="0" algn="ctr">
               <a:buNone/>
             </a:pPr>
             <a:r>
@@ -4088,7 +4077,30 @@
                 <a:ea typeface="Arial" pitchFamily="34" charset="-122"/>
                 <a:cs typeface="Arial" pitchFamily="34" charset="-120"/>
               </a:rPr>
-              <a:t>Emotion is a good servant — and a catastrophic master.</a:t>
+              <a:t>Emotion is a good servant </a:t>
+            </a:r>
+            <a:r>
+              <a:rPr lang="en-US" sz="2100" b="1" dirty="0">
+                <a:solidFill>
+                  <a:srgbClr val="FFFFFF"/>
+                </a:solidFill>
+                <a:latin typeface="Arial" pitchFamily="34" charset="0"/>
+                <a:ea typeface="Arial" pitchFamily="34" charset="-122"/>
+                <a:cs typeface="Arial" pitchFamily="34" charset="-120"/>
+                <a:sym typeface="Wingdings" pitchFamily="2" charset="2"/>
+              </a:rPr>
+              <a:t></a:t>
+            </a:r>
+            <a:r>
+              <a:rPr lang="en-US" sz="2100" b="1" dirty="0">
+                <a:solidFill>
+                  <a:srgbClr val="FFFFFF"/>
+                </a:solidFill>
+                <a:latin typeface="Arial" pitchFamily="34" charset="0"/>
+                <a:ea typeface="Arial" pitchFamily="34" charset="-122"/>
+                <a:cs typeface="Arial" pitchFamily="34" charset="-120"/>
+              </a:rPr>
+              <a:t> and a catastrophic master.</a:t>
             </a:r>
             <a:endParaRPr lang="en-US" sz="1600" dirty="0"/>
           </a:p>
@@ -4102,7 +4114,7 @@
         </p:nvSpPr>
         <p:spPr>
           <a:xfrm>
-            <a:off x="365760" y="4617720"/>
+            <a:off x="365760" y="4526280"/>
             <a:ext cx="8412480" cy="960120"/>
           </a:xfrm>
           <a:prstGeom prst="rect">
@@ -4115,11 +4127,11 @@
           <a:bodyPr wrap="square" lIns="0" tIns="0" rIns="0" bIns="0" rtlCol="0" anchor="t"/>
           <a:lstStyle/>
           <a:p>
-            <a:pPr algn="l" indent="0" marL="0">
+            <a:pPr marL="0" indent="0" algn="l">
               <a:buNone/>
             </a:pPr>
             <a:r>
-              <a:rPr lang="en-US" sz="1400" dirty="0">
+              <a:rPr lang="en-US" dirty="0">
                 <a:solidFill>
                   <a:srgbClr val="000000"/>
                 </a:solidFill>
@@ -4127,24 +4139,32 @@
                 <a:ea typeface="Arial" pitchFamily="34" charset="-122"/>
                 <a:cs typeface="Arial" pitchFamily="34" charset="-120"/>
               </a:rPr>
-              <a:t>As a servant, feeling fuels compassion, softens the hard word, moves us toward the hurting.
-</a:t>
-            </a:r>
-            <a:pPr algn="l" indent="0" marL="0">
-              <a:buNone/>
-            </a:pPr>
-            <a:r>
-              <a:rPr lang="en-US" sz="1400" dirty="0">
+              <a:t>As a servant, feeling fuels compassion, softens the hard word, moves us toward the hurting.  As a master, feeling overrules the word of God </a:t>
+            </a:r>
+            <a:r>
+              <a:rPr lang="en-US" dirty="0">
                 <a:solidFill>
                   <a:srgbClr val="000000"/>
                 </a:solidFill>
                 <a:latin typeface="Arial" pitchFamily="34" charset="0"/>
                 <a:ea typeface="Arial" pitchFamily="34" charset="-122"/>
                 <a:cs typeface="Arial" pitchFamily="34" charset="-120"/>
-              </a:rPr>
-              <a:t>As a master, feeling overrules the word of God — which is precisely the sin of Eden. The cure is not less compassion. It is compassion put back under its King.</a:t>
-            </a:r>
-            <a:endParaRPr lang="en-US" sz="1600" dirty="0"/>
+                <a:sym typeface="Wingdings" pitchFamily="2" charset="2"/>
+              </a:rPr>
+              <a:t></a:t>
+            </a:r>
+            <a:r>
+              <a:rPr lang="en-US" dirty="0">
+                <a:solidFill>
+                  <a:srgbClr val="000000"/>
+                </a:solidFill>
+                <a:latin typeface="Arial" pitchFamily="34" charset="0"/>
+                <a:ea typeface="Arial" pitchFamily="34" charset="-122"/>
+                <a:cs typeface="Arial" pitchFamily="34" charset="-120"/>
+              </a:rPr>
+              <a:t> which is precisely the sin of Eden. The cure is not less compassion. It is compassion put back under its King.</a:t>
+            </a:r>
+            <a:endParaRPr lang="en-US" sz="2000" dirty="0"/>
           </a:p>
         </p:txBody>
       </p:sp>
@@ -4169,11 +4189,11 @@
           <a:bodyPr wrap="square" lIns="0" tIns="0" rIns="0" bIns="0" rtlCol="0" anchor="t"/>
           <a:lstStyle/>
           <a:p>
-            <a:pPr algn="l" indent="0" marL="0">
+            <a:pPr marL="0" indent="0" algn="l">
               <a:buNone/>
             </a:pPr>
             <a:r>
-              <a:rPr lang="en-US" sz="1400" b="1" dirty="0">
+              <a:rPr lang="en-US" sz="2000" b="1" dirty="0">
                 <a:solidFill>
                   <a:srgbClr val="1F497D"/>
                 </a:solidFill>
@@ -4183,11 +4203,8 @@
               </a:rPr>
               <a:t>And remember whose order this is: </a:t>
             </a:r>
-            <a:pPr algn="l" indent="0" marL="0">
-              <a:buNone/>
-            </a:pPr>
-            <a:r>
-              <a:rPr lang="en-US" sz="1350" dirty="0">
+            <a:r>
+              <a:rPr lang="en-US" dirty="0">
                 <a:solidFill>
                   <a:srgbClr val="000000"/>
                 </a:solidFill>
@@ -4195,9 +4212,32 @@
                 <a:ea typeface="Arial" pitchFamily="34" charset="-122"/>
                 <a:cs typeface="Arial" pitchFamily="34" charset="-120"/>
               </a:rPr>
-              <a:t>grace first. God’s kindness leads us to repentance (Rom 2:4). Mercy first, altar second — the truth we speak rests on a love already proven at the cross.</a:t>
-            </a:r>
-            <a:endParaRPr lang="en-US" sz="1600" dirty="0"/>
+              <a:t>grace first. God’s kindness leads us to repentance (Rom 2:4). Mercy first, altar second </a:t>
+            </a:r>
+            <a:r>
+              <a:rPr lang="en-US" dirty="0">
+                <a:solidFill>
+                  <a:srgbClr val="000000"/>
+                </a:solidFill>
+                <a:latin typeface="Arial" pitchFamily="34" charset="0"/>
+                <a:ea typeface="Arial" pitchFamily="34" charset="-122"/>
+                <a:cs typeface="Arial" pitchFamily="34" charset="-120"/>
+                <a:sym typeface="Wingdings" pitchFamily="2" charset="2"/>
+              </a:rPr>
+              <a:t></a:t>
+            </a:r>
+            <a:r>
+              <a:rPr lang="en-US" dirty="0">
+                <a:solidFill>
+                  <a:srgbClr val="000000"/>
+                </a:solidFill>
+                <a:latin typeface="Arial" pitchFamily="34" charset="0"/>
+                <a:ea typeface="Arial" pitchFamily="34" charset="-122"/>
+                <a:cs typeface="Arial" pitchFamily="34" charset="-120"/>
+              </a:rPr>
+              <a:t> the truth we speak rests on a love already proven at the cross.</a:t>
+            </a:r>
+            <a:endParaRPr lang="en-US" sz="2400" dirty="0"/>
           </a:p>
         </p:txBody>
       </p:sp>
@@ -4215,26 +4255,26 @@
               <p:cTn id="2" dur="indefinite" nodeType="mainSeq">
                 <p:childTnLst>
                   <p:par>
-                    <p:cTn id="7" fill="hold">
+                    <p:cTn id="3" fill="hold">
                       <p:stCondLst>
                         <p:cond delay="indefinite"/>
                       </p:stCondLst>
                       <p:childTnLst>
                         <p:par>
-                          <p:cTn id="8" fill="hold">
+                          <p:cTn id="4" fill="hold">
                             <p:stCondLst>
                               <p:cond delay="0"/>
                             </p:stCondLst>
                             <p:childTnLst>
                               <p:par>
-                                <p:cTn id="3" presetID="42" presetClass="entr" presetSubtype="0" fill="hold" grpId="0" nodeType="clickEffect">
+                                <p:cTn id="5" presetID="42" presetClass="entr" presetSubtype="0" fill="hold" nodeType="clickEffect">
                                   <p:stCondLst>
                                     <p:cond delay="0"/>
                                   </p:stCondLst>
                                   <p:childTnLst>
                                     <p:set>
                                       <p:cBhvr>
-                                        <p:cTn id="4" dur="1" fill="hold">
+                                        <p:cTn id="6" dur="1" fill="hold">
                                           <p:stCondLst>
                                             <p:cond delay="0"/>
                                           </p:stCondLst>
@@ -4252,7 +4292,7 @@
                                     </p:set>
                                     <p:animEffect transition="in" filter="fade">
                                       <p:cBhvr>
-                                        <p:cTn id="5" dur="1000"/>
+                                        <p:cTn id="7" dur="1000"/>
                                         <p:tgtEl>
                                           <p:spTgt spid="4"/>
                                         </p:tgtEl>
@@ -4260,7 +4300,7 @@
                                     </p:animEffect>
                                     <p:anim calcmode="lin" valueType="num">
                                       <p:cBhvr>
-                                        <p:cTn id="6" dur="1000" fill="hold"/>
+                                        <p:cTn id="8" dur="1000" fill="hold"/>
                                         <p:tgtEl>
                                           <p:spTgt spid="4"/>
                                         </p:tgtEl>
@@ -4291,26 +4331,26 @@
                     </p:cTn>
                   </p:par>
                   <p:par>
-                    <p:cTn id="13" fill="hold">
+                    <p:cTn id="9" fill="hold">
                       <p:stCondLst>
                         <p:cond delay="indefinite"/>
                       </p:stCondLst>
                       <p:childTnLst>
                         <p:par>
-                          <p:cTn id="14" fill="hold">
+                          <p:cTn id="10" fill="hold">
                             <p:stCondLst>
                               <p:cond delay="0"/>
                             </p:stCondLst>
                             <p:childTnLst>
                               <p:par>
-                                <p:cTn id="9" presetID="42" presetClass="entr" presetSubtype="0" fill="hold" grpId="0" nodeType="clickEffect">
+                                <p:cTn id="11" presetID="42" presetClass="entr" presetSubtype="0" fill="hold" nodeType="clickEffect">
                                   <p:stCondLst>
                                     <p:cond delay="0"/>
                                   </p:stCondLst>
                                   <p:childTnLst>
                                     <p:set>
                                       <p:cBhvr>
-                                        <p:cTn id="10" dur="1" fill="hold">
+                                        <p:cTn id="12" dur="1" fill="hold">
                                           <p:stCondLst>
                                             <p:cond delay="0"/>
                                           </p:stCondLst>
@@ -4328,7 +4368,7 @@
                                     </p:set>
                                     <p:animEffect transition="in" filter="fade">
                                       <p:cBhvr>
-                                        <p:cTn id="11" dur="1000"/>
+                                        <p:cTn id="13" dur="1000"/>
                                         <p:tgtEl>
                                           <p:spTgt spid="5"/>
                                         </p:tgtEl>
@@ -4336,7 +4376,7 @@
                                     </p:animEffect>
                                     <p:anim calcmode="lin" valueType="num">
                                       <p:cBhvr>
-                                        <p:cTn id="12" dur="1000" fill="hold"/>
+                                        <p:cTn id="14" dur="1000" fill="hold"/>
                                         <p:tgtEl>
                                           <p:spTgt spid="5"/>
                                         </p:tgtEl>
@@ -4367,26 +4407,26 @@
                     </p:cTn>
                   </p:par>
                   <p:par>
-                    <p:cTn id="23" fill="hold">
+                    <p:cTn id="15" fill="hold">
                       <p:stCondLst>
                         <p:cond delay="indefinite"/>
                       </p:stCondLst>
                       <p:childTnLst>
                         <p:par>
-                          <p:cTn id="24" fill="hold">
+                          <p:cTn id="16" fill="hold">
                             <p:stCondLst>
                               <p:cond delay="0"/>
                             </p:stCondLst>
                             <p:childTnLst>
                               <p:par>
-                                <p:cTn id="15" presetID="42" presetClass="entr" presetSubtype="0" fill="hold" grpId="0" nodeType="clickEffect">
+                                <p:cTn id="17" presetID="42" presetClass="entr" presetSubtype="0" fill="hold" nodeType="clickEffect">
                                   <p:stCondLst>
                                     <p:cond delay="0"/>
                                   </p:stCondLst>
                                   <p:childTnLst>
                                     <p:set>
                                       <p:cBhvr>
-                                        <p:cTn id="16" dur="1" fill="hold">
+                                        <p:cTn id="18" dur="1" fill="hold">
                                           <p:stCondLst>
                                             <p:cond delay="0"/>
                                           </p:stCondLst>
@@ -4404,7 +4444,7 @@
                                     </p:set>
                                     <p:animEffect transition="in" filter="fade">
                                       <p:cBhvr>
-                                        <p:cTn id="17" dur="1000"/>
+                                        <p:cTn id="19" dur="1000"/>
                                         <p:tgtEl>
                                           <p:spTgt spid="6"/>
                                         </p:tgtEl>
@@ -4412,7 +4452,7 @@
                                     </p:animEffect>
                                     <p:anim calcmode="lin" valueType="num">
                                       <p:cBhvr>
-                                        <p:cTn id="18" dur="1000" fill="hold"/>
+                                        <p:cTn id="20" dur="1000" fill="hold"/>
                                         <p:tgtEl>
                                           <p:spTgt spid="6"/>
                                         </p:tgtEl>
@@ -4437,14 +4477,14 @@
                                 </p:cTn>
                               </p:par>
                               <p:par>
-                                <p:cTn id="19" presetID="42" presetClass="entr" presetSubtype="0" fill="hold" grpId="0" nodeType="withEffect">
+                                <p:cTn id="21" presetID="42" presetClass="entr" presetSubtype="0" fill="hold" nodeType="withEffect">
                                   <p:stCondLst>
                                     <p:cond delay="0"/>
                                   </p:stCondLst>
                                   <p:childTnLst>
                                     <p:set>
                                       <p:cBhvr>
-                                        <p:cTn id="20" dur="1" fill="hold">
+                                        <p:cTn id="22" dur="1" fill="hold">
                                           <p:stCondLst>
                                             <p:cond delay="0"/>
                                           </p:stCondLst>
@@ -4462,7 +4502,7 @@
                                     </p:set>
                                     <p:animEffect transition="in" filter="fade">
                                       <p:cBhvr>
-                                        <p:cTn id="21" dur="1000"/>
+                                        <p:cTn id="23" dur="1000"/>
                                         <p:tgtEl>
                                           <p:spTgt spid="7"/>
                                         </p:tgtEl>
@@ -4470,7 +4510,7 @@
                                     </p:animEffect>
                                     <p:anim calcmode="lin" valueType="num">
                                       <p:cBhvr>
-                                        <p:cTn id="22" dur="1000" fill="hold"/>
+                                        <p:cTn id="24" dur="1000" fill="hold"/>
                                         <p:tgtEl>
                                           <p:spTgt spid="7"/>
                                         </p:tgtEl>
@@ -4501,26 +4541,26 @@
                     </p:cTn>
                   </p:par>
                   <p:par>
-                    <p:cTn id="29" fill="hold">
+                    <p:cTn id="25" fill="hold">
                       <p:stCondLst>
                         <p:cond delay="indefinite"/>
                       </p:stCondLst>
                       <p:childTnLst>
                         <p:par>
-                          <p:cTn id="30" fill="hold">
+                          <p:cTn id="26" fill="hold">
                             <p:stCondLst>
                               <p:cond delay="0"/>
                             </p:stCondLst>
                             <p:childTnLst>
                               <p:par>
-                                <p:cTn id="25" presetID="42" presetClass="entr" presetSubtype="0" fill="hold" grpId="0" nodeType="clickEffect">
+                                <p:cTn id="27" presetID="42" presetClass="entr" presetSubtype="0" fill="hold" nodeType="clickEffect">
                                   <p:stCondLst>
                                     <p:cond delay="0"/>
                                   </p:stCondLst>
                                   <p:childTnLst>
                                     <p:set>
                                       <p:cBhvr>
-                                        <p:cTn id="26" dur="1" fill="hold">
+                                        <p:cTn id="28" dur="1" fill="hold">
                                           <p:stCondLst>
                                             <p:cond delay="0"/>
                                           </p:stCondLst>
@@ -4538,7 +4578,7 @@
                                     </p:set>
                                     <p:animEffect transition="in" filter="fade">
                                       <p:cBhvr>
-                                        <p:cTn id="27" dur="1000"/>
+                                        <p:cTn id="29" dur="1000"/>
                                         <p:tgtEl>
                                           <p:spTgt spid="8"/>
                                         </p:tgtEl>
@@ -4546,7 +4586,7 @@
                                     </p:animEffect>
                                     <p:anim calcmode="lin" valueType="num">
                                       <p:cBhvr>
-                                        <p:cTn id="28" dur="1000" fill="hold"/>
+                                        <p:cTn id="30" dur="1000" fill="hold"/>
                                         <p:tgtEl>
                                           <p:spTgt spid="8"/>
                                         </p:tgtEl>
@@ -4577,26 +4617,26 @@
                     </p:cTn>
                   </p:par>
                   <p:par>
-                    <p:cTn id="35" fill="hold">
+                    <p:cTn id="31" fill="hold">
                       <p:stCondLst>
                         <p:cond delay="indefinite"/>
                       </p:stCondLst>
                       <p:childTnLst>
                         <p:par>
-                          <p:cTn id="36" fill="hold">
+                          <p:cTn id="32" fill="hold">
                             <p:stCondLst>
                               <p:cond delay="0"/>
                             </p:stCondLst>
                             <p:childTnLst>
                               <p:par>
-                                <p:cTn id="31" presetID="42" presetClass="entr" presetSubtype="0" fill="hold" grpId="0" nodeType="clickEffect">
+                                <p:cTn id="33" presetID="42" presetClass="entr" presetSubtype="0" fill="hold" nodeType="clickEffect">
                                   <p:stCondLst>
                                     <p:cond delay="0"/>
                                   </p:stCondLst>
                                   <p:childTnLst>
                                     <p:set>
                                       <p:cBhvr>
-                                        <p:cTn id="32" dur="1" fill="hold">
+                                        <p:cTn id="34" dur="1" fill="hold">
                                           <p:stCondLst>
                                             <p:cond delay="0"/>
                                           </p:stCondLst>
@@ -4614,7 +4654,7 @@
                                     </p:set>
                                     <p:animEffect transition="in" filter="fade">
                                       <p:cBhvr>
-                                        <p:cTn id="33" dur="1000"/>
+                                        <p:cTn id="35" dur="1000"/>
                                         <p:tgtEl>
                                           <p:spTgt spid="9"/>
                                         </p:tgtEl>
@@ -4622,7 +4662,7 @@
                                     </p:animEffect>
                                     <p:anim calcmode="lin" valueType="num">
                                       <p:cBhvr>
-                                        <p:cTn id="34" dur="1000" fill="hold"/>
+                                        <p:cTn id="36" dur="1000" fill="hold"/>
                                         <p:tgtEl>
                                           <p:spTgt spid="9"/>
                                         </p:tgtEl>
@@ -4715,7 +4755,7 @@
           <a:bodyPr wrap="square" lIns="0" tIns="0" rIns="0" bIns="0" rtlCol="0" anchor="t"/>
           <a:lstStyle/>
           <a:p>
-            <a:pPr algn="l" indent="0" marL="0">
+            <a:pPr marL="0" indent="0" algn="l">
               <a:buNone/>
             </a:pPr>
             <a:r>
@@ -4754,11 +4794,11 @@
           <a:bodyPr wrap="square" lIns="0" tIns="0" rIns="0" bIns="0" rtlCol="0" anchor="t"/>
           <a:lstStyle/>
           <a:p>
-            <a:pPr algn="l" indent="0" marL="0">
+            <a:pPr marL="0" indent="0" algn="l">
               <a:buNone/>
             </a:pPr>
             <a:r>
-              <a:rPr lang="en-US" sz="1300" b="1" dirty="0">
+              <a:rPr lang="en-US" sz="2000" b="1" dirty="0">
                 <a:solidFill>
                   <a:srgbClr val="4F81BD"/>
                 </a:solidFill>
@@ -4768,7 +4808,7 @@
               </a:rPr>
               <a:t>Ten minutes — this is the week’s practice</a:t>
             </a:r>
-            <a:endParaRPr lang="en-US" sz="1600" dirty="0"/>
+            <a:endParaRPr lang="en-US" sz="2800" dirty="0"/>
           </a:p>
         </p:txBody>
       </p:sp>
@@ -4793,11 +4833,11 @@
           <a:bodyPr wrap="square" lIns="0" tIns="0" rIns="0" bIns="0" rtlCol="0" anchor="t"/>
           <a:lstStyle/>
           <a:p>
-            <a:pPr algn="l" indent="0" marL="0">
+            <a:pPr marL="0" indent="0" algn="l">
               <a:buNone/>
             </a:pPr>
             <a:r>
-              <a:rPr lang="en-US" sz="2000" b="1" dirty="0">
+              <a:rPr lang="en-US" sz="2800" b="1" dirty="0">
                 <a:solidFill>
                   <a:srgbClr val="1F497D"/>
                 </a:solidFill>
@@ -4807,11 +4847,8 @@
               </a:rPr>
               <a:t>1.  </a:t>
             </a:r>
-            <a:pPr algn="l" indent="0" marL="0">
-              <a:buNone/>
-            </a:pPr>
-            <a:r>
-              <a:rPr lang="en-US" sz="1800" dirty="0">
+            <a:r>
+              <a:rPr lang="en-US" sz="2400" dirty="0">
                 <a:solidFill>
                   <a:srgbClr val="000000"/>
                 </a:solidFill>
@@ -4821,7 +4858,7 @@
               </a:rPr>
               <a:t>Where is the line between compassion and enabling? How can you tell, in a real situation, which one you’re doing?</a:t>
             </a:r>
-            <a:endParaRPr lang="en-US" sz="1600" dirty="0"/>
+            <a:endParaRPr lang="en-US" sz="2000" dirty="0"/>
           </a:p>
         </p:txBody>
       </p:sp>
@@ -4846,11 +4883,11 @@
           <a:bodyPr wrap="square" lIns="0" tIns="0" rIns="0" bIns="0" rtlCol="0" anchor="t"/>
           <a:lstStyle/>
           <a:p>
-            <a:pPr algn="l" indent="0" marL="0">
+            <a:pPr marL="0" indent="0" algn="l">
               <a:buNone/>
             </a:pPr>
             <a:r>
-              <a:rPr lang="en-US" sz="2000" b="1" dirty="0">
+              <a:rPr lang="en-US" sz="2800" b="1" dirty="0">
                 <a:solidFill>
                   <a:srgbClr val="1F497D"/>
                 </a:solidFill>
@@ -4860,11 +4897,8 @@
               </a:rPr>
               <a:t>2.  </a:t>
             </a:r>
-            <a:pPr algn="l" indent="0" marL="0">
-              <a:buNone/>
-            </a:pPr>
-            <a:r>
-              <a:rPr lang="en-US" sz="1800" dirty="0">
+            <a:r>
+              <a:rPr lang="en-US" sz="2400" dirty="0">
                 <a:solidFill>
                   <a:srgbClr val="000000"/>
                 </a:solidFill>
@@ -4872,62 +4906,32 @@
                 <a:ea typeface="Arial" pitchFamily="34" charset="-122"/>
                 <a:cs typeface="Arial" pitchFamily="34" charset="-120"/>
               </a:rPr>
-              <a:t>How do you speak truth without weaponizing it — and love without surrendering it? Which failure is yours?</a:t>
-            </a:r>
-            <a:endParaRPr lang="en-US" sz="1600" dirty="0"/>
-          </a:p>
-        </p:txBody>
-      </p:sp>
-      <p:sp>
-        <p:nvSpPr>
-          <p:cNvPr id="6" name="x3"/>
-          <p:cNvSpPr txBox="1"/>
-          <p:nvPr/>
-        </p:nvSpPr>
-        <p:spPr>
-          <a:xfrm>
-            <a:off x="457200" y="4800600"/>
-            <a:ext cx="8229600" cy="1097280"/>
-          </a:xfrm>
-          <a:prstGeom prst="rect">
-            <a:avLst/>
-          </a:prstGeom>
-          <a:noFill/>
-          <a:ln/>
-        </p:spPr>
-        <p:txBody>
-          <a:bodyPr wrap="square" lIns="0" tIns="0" rIns="0" bIns="0" rtlCol="0" anchor="t"/>
-          <a:lstStyle/>
-          <a:p>
-            <a:pPr algn="l" indent="0" marL="0">
-              <a:buNone/>
-            </a:pPr>
-            <a:r>
-              <a:rPr lang="en-US" sz="1400" b="1" dirty="0">
-                <a:solidFill>
-                  <a:srgbClr val="B0413E"/>
-                </a:solidFill>
-                <a:latin typeface="Arial" pitchFamily="34" charset="0"/>
-                <a:ea typeface="Arial" pitchFamily="34" charset="-122"/>
-                <a:cs typeface="Arial" pitchFamily="34" charset="-120"/>
-              </a:rPr>
-              <a:t>Handle with care: </a:t>
-            </a:r>
-            <a:pPr algn="l" indent="0" marL="0">
-              <a:buNone/>
-            </a:pPr>
-            <a:r>
-              <a:rPr lang="en-US" sz="1350" i="1" dirty="0">
+              <a:t>How do you speak truth without weaponizing it </a:t>
+            </a:r>
+            <a:r>
+              <a:rPr lang="en-US" sz="2400" dirty="0">
                 <a:solidFill>
                   <a:srgbClr val="000000"/>
                 </a:solidFill>
                 <a:latin typeface="Arial" pitchFamily="34" charset="0"/>
                 <a:ea typeface="Arial" pitchFamily="34" charset="-122"/>
                 <a:cs typeface="Arial" pitchFamily="34" charset="-120"/>
-              </a:rPr>
-              <a:t>people in this room are carrying real relationships — a wandering child, a hard marriage. Keep it about the principle, and be gentle.</a:t>
-            </a:r>
-            <a:endParaRPr lang="en-US" sz="1600" dirty="0"/>
+                <a:sym typeface="Wingdings" pitchFamily="2" charset="2"/>
+              </a:rPr>
+              <a:t></a:t>
+            </a:r>
+            <a:r>
+              <a:rPr lang="en-US" sz="2400" dirty="0">
+                <a:solidFill>
+                  <a:srgbClr val="000000"/>
+                </a:solidFill>
+                <a:latin typeface="Arial" pitchFamily="34" charset="0"/>
+                <a:ea typeface="Arial" pitchFamily="34" charset="-122"/>
+                <a:cs typeface="Arial" pitchFamily="34" charset="-120"/>
+              </a:rPr>
+              <a:t> and love without surrendering it? Which failure is yours?</a:t>
+            </a:r>
+            <a:endParaRPr lang="en-US" sz="2000" dirty="0"/>
           </a:p>
         </p:txBody>
       </p:sp>
@@ -4945,26 +4949,26 @@
               <p:cTn id="2" dur="indefinite" nodeType="mainSeq">
                 <p:childTnLst>
                   <p:par>
-                    <p:cTn id="7" fill="hold">
+                    <p:cTn id="3" fill="hold">
                       <p:stCondLst>
                         <p:cond delay="indefinite"/>
                       </p:stCondLst>
                       <p:childTnLst>
                         <p:par>
-                          <p:cTn id="8" fill="hold">
+                          <p:cTn id="4" fill="hold">
                             <p:stCondLst>
                               <p:cond delay="0"/>
                             </p:stCondLst>
                             <p:childTnLst>
                               <p:par>
-                                <p:cTn id="3" presetID="42" presetClass="entr" presetSubtype="0" fill="hold" grpId="0" nodeType="clickEffect">
+                                <p:cTn id="5" presetID="42" presetClass="entr" presetSubtype="0" fill="hold" nodeType="clickEffect">
                                   <p:stCondLst>
                                     <p:cond delay="0"/>
                                   </p:stCondLst>
                                   <p:childTnLst>
                                     <p:set>
                                       <p:cBhvr>
-                                        <p:cTn id="4" dur="1" fill="hold">
+                                        <p:cTn id="6" dur="1" fill="hold">
                                           <p:stCondLst>
                                             <p:cond delay="0"/>
                                           </p:stCondLst>
@@ -4982,7 +4986,7 @@
                                     </p:set>
                                     <p:animEffect transition="in" filter="fade">
                                       <p:cBhvr>
-                                        <p:cTn id="5" dur="1000"/>
+                                        <p:cTn id="7" dur="1000"/>
                                         <p:tgtEl>
                                           <p:spTgt spid="4"/>
                                         </p:tgtEl>
@@ -4990,7 +4994,7 @@
                                     </p:animEffect>
                                     <p:anim calcmode="lin" valueType="num">
                                       <p:cBhvr>
-                                        <p:cTn id="6" dur="1000" fill="hold"/>
+                                        <p:cTn id="8" dur="1000" fill="hold"/>
                                         <p:tgtEl>
                                           <p:spTgt spid="4"/>
                                         </p:tgtEl>
@@ -5021,26 +5025,26 @@
                     </p:cTn>
                   </p:par>
                   <p:par>
-                    <p:cTn id="13" fill="hold">
+                    <p:cTn id="9" fill="hold">
                       <p:stCondLst>
                         <p:cond delay="indefinite"/>
                       </p:stCondLst>
                       <p:childTnLst>
                         <p:par>
-                          <p:cTn id="14" fill="hold">
+                          <p:cTn id="10" fill="hold">
                             <p:stCondLst>
                               <p:cond delay="0"/>
                             </p:stCondLst>
                             <p:childTnLst>
                               <p:par>
-                                <p:cTn id="9" presetID="42" presetClass="entr" presetSubtype="0" fill="hold" grpId="0" nodeType="clickEffect">
+                                <p:cTn id="11" presetID="42" presetClass="entr" presetSubtype="0" fill="hold" nodeType="clickEffect">
                                   <p:stCondLst>
                                     <p:cond delay="0"/>
                                   </p:stCondLst>
                                   <p:childTnLst>
                                     <p:set>
                                       <p:cBhvr>
-                                        <p:cTn id="10" dur="1" fill="hold">
+                                        <p:cTn id="12" dur="1" fill="hold">
                                           <p:stCondLst>
                                             <p:cond delay="0"/>
                                           </p:stCondLst>
@@ -5058,7 +5062,7 @@
                                     </p:set>
                                     <p:animEffect transition="in" filter="fade">
                                       <p:cBhvr>
-                                        <p:cTn id="11" dur="1000"/>
+                                        <p:cTn id="13" dur="1000"/>
                                         <p:tgtEl>
                                           <p:spTgt spid="5"/>
                                         </p:tgtEl>
@@ -5066,85 +5070,9 @@
                                     </p:animEffect>
                                     <p:anim calcmode="lin" valueType="num">
                                       <p:cBhvr>
-                                        <p:cTn id="12" dur="1000" fill="hold"/>
+                                        <p:cTn id="14" dur="1000" fill="hold"/>
                                         <p:tgtEl>
                                           <p:spTgt spid="5"/>
-                                        </p:tgtEl>
-                                        <p:attrNameLst>
-                                          <p:attrName>ppt_y</p:attrName>
-                                        </p:attrNameLst>
-                                      </p:cBhvr>
-                                      <p:tavLst>
-                                        <p:tav tm="0">
-                                          <p:val>
-                                            <p:strVal val="#ppt_y+.1"/>
-                                          </p:val>
-                                        </p:tav>
-                                        <p:tav tm="100000">
-                                          <p:val>
-                                            <p:strVal val="#ppt_y"/>
-                                          </p:val>
-                                        </p:tav>
-                                      </p:tavLst>
-                                    </p:anim>
-                                  </p:childTnLst>
-                                </p:cTn>
-                              </p:par>
-                            </p:childTnLst>
-                          </p:cTn>
-                        </p:par>
-                      </p:childTnLst>
-                    </p:cTn>
-                  </p:par>
-                  <p:par>
-                    <p:cTn id="19" fill="hold">
-                      <p:stCondLst>
-                        <p:cond delay="indefinite"/>
-                      </p:stCondLst>
-                      <p:childTnLst>
-                        <p:par>
-                          <p:cTn id="20" fill="hold">
-                            <p:stCondLst>
-                              <p:cond delay="0"/>
-                            </p:stCondLst>
-                            <p:childTnLst>
-                              <p:par>
-                                <p:cTn id="15" presetID="42" presetClass="entr" presetSubtype="0" fill="hold" grpId="0" nodeType="clickEffect">
-                                  <p:stCondLst>
-                                    <p:cond delay="0"/>
-                                  </p:stCondLst>
-                                  <p:childTnLst>
-                                    <p:set>
-                                      <p:cBhvr>
-                                        <p:cTn id="16" dur="1" fill="hold">
-                                          <p:stCondLst>
-                                            <p:cond delay="0"/>
-                                          </p:stCondLst>
-                                        </p:cTn>
-                                        <p:tgtEl>
-                                          <p:spTgt spid="6"/>
-                                        </p:tgtEl>
-                                        <p:attrNameLst>
-                                          <p:attrName>style.visibility</p:attrName>
-                                        </p:attrNameLst>
-                                      </p:cBhvr>
-                                      <p:to>
-                                        <p:strVal val="visible"/>
-                                      </p:to>
-                                    </p:set>
-                                    <p:animEffect transition="in" filter="fade">
-                                      <p:cBhvr>
-                                        <p:cTn id="17" dur="1000"/>
-                                        <p:tgtEl>
-                                          <p:spTgt spid="6"/>
-                                        </p:tgtEl>
-                                      </p:cBhvr>
-                                    </p:animEffect>
-                                    <p:anim calcmode="lin" valueType="num">
-                                      <p:cBhvr>
-                                        <p:cTn id="18" dur="1000" fill="hold"/>
-                                        <p:tgtEl>
-                                          <p:spTgt spid="6"/>
                                         </p:tgtEl>
                                         <p:attrNameLst>
                                           <p:attrName>ppt_y</p:attrName>
@@ -5235,7 +5163,7 @@
           <a:bodyPr wrap="square" lIns="0" tIns="0" rIns="0" bIns="0" rtlCol="0" anchor="t"/>
           <a:lstStyle/>
           <a:p>
-            <a:pPr algn="l" indent="0" marL="0">
+            <a:pPr marL="0" indent="0" algn="l">
               <a:buNone/>
             </a:pPr>
             <a:r>
@@ -5274,11 +5202,11 @@
           <a:bodyPr wrap="square" lIns="0" tIns="0" rIns="0" bIns="0" rtlCol="0" anchor="t"/>
           <a:lstStyle/>
           <a:p>
-            <a:pPr algn="l" indent="0" marL="0">
+            <a:pPr marL="0" indent="0" algn="l">
               <a:buNone/>
             </a:pPr>
             <a:r>
-              <a:rPr lang="en-US" sz="1300" b="1" dirty="0">
+              <a:rPr lang="en-US" sz="2000" b="1" dirty="0">
                 <a:solidFill>
                   <a:srgbClr val="4F81BD"/>
                 </a:solidFill>
@@ -5286,9 +5214,32 @@
                 <a:ea typeface="Arial" pitchFamily="34" charset="-122"/>
                 <a:cs typeface="Arial" pitchFamily="34" charset="-120"/>
               </a:rPr>
-              <a:t>For next week — and a unit turns</a:t>
-            </a:r>
-            <a:endParaRPr lang="en-US" sz="1600" dirty="0"/>
+              <a:t>For next week </a:t>
+            </a:r>
+            <a:r>
+              <a:rPr lang="en-US" sz="2000" b="1" dirty="0">
+                <a:solidFill>
+                  <a:srgbClr val="4F81BD"/>
+                </a:solidFill>
+                <a:latin typeface="Arial" pitchFamily="34" charset="0"/>
+                <a:ea typeface="Arial" pitchFamily="34" charset="-122"/>
+                <a:cs typeface="Arial" pitchFamily="34" charset="-120"/>
+                <a:sym typeface="Wingdings" pitchFamily="2" charset="2"/>
+              </a:rPr>
+              <a:t></a:t>
+            </a:r>
+            <a:r>
+              <a:rPr lang="en-US" sz="2000" b="1" dirty="0">
+                <a:solidFill>
+                  <a:srgbClr val="4F81BD"/>
+                </a:solidFill>
+                <a:latin typeface="Arial" pitchFamily="34" charset="0"/>
+                <a:ea typeface="Arial" pitchFamily="34" charset="-122"/>
+                <a:cs typeface="Arial" pitchFamily="34" charset="-120"/>
+              </a:rPr>
+              <a:t> and a unit turns</a:t>
+            </a:r>
+            <a:endParaRPr lang="en-US" sz="2800" dirty="0"/>
           </a:p>
         </p:txBody>
       </p:sp>
@@ -5313,11 +5264,11 @@
           <a:bodyPr wrap="square" lIns="0" tIns="0" rIns="0" bIns="0" rtlCol="0" anchor="t"/>
           <a:lstStyle/>
           <a:p>
-            <a:pPr algn="l" indent="0" marL="0">
+            <a:pPr marL="0" indent="0" algn="l">
               <a:buNone/>
             </a:pPr>
             <a:r>
-              <a:rPr lang="en-US" sz="1700" b="1" dirty="0">
+              <a:rPr lang="en-US" sz="2000" b="1" dirty="0">
                 <a:solidFill>
                   <a:srgbClr val="1F497D"/>
                 </a:solidFill>
@@ -5328,11 +5279,8 @@
               <a:t>For next week, read:
 </a:t>
             </a:r>
-            <a:pPr algn="l" indent="0" marL="0">
-              <a:buNone/>
-            </a:pPr>
-            <a:r>
-              <a:rPr lang="en-US" sz="1500" dirty="0">
+            <a:r>
+              <a:rPr lang="en-US" dirty="0">
                 <a:solidFill>
                   <a:srgbClr val="000000"/>
                 </a:solidFill>
@@ -5340,14 +5288,10 @@
                 <a:ea typeface="Arial" pitchFamily="34" charset="-122"/>
                 <a:cs typeface="Arial" pitchFamily="34" charset="-120"/>
               </a:rPr>
-              <a:t>•  Deuteronomy 8:1–10  — why did God lead Israel through the wilderness? Find the word “test” and note what it was testing.
-</a:t>
-            </a:r>
-            <a:pPr algn="l" indent="0" marL="0">
-              <a:buNone/>
-            </a:pPr>
-            <a:r>
-              <a:rPr lang="en-US" sz="1500" dirty="0">
+              <a:t>•  </a:t>
+            </a:r>
+            <a:r>
+              <a:rPr lang="en-US" b="1" dirty="0">
                 <a:solidFill>
                   <a:srgbClr val="000000"/>
                 </a:solidFill>
@@ -5355,9 +5299,43 @@
                 <a:ea typeface="Arial" pitchFamily="34" charset="-122"/>
                 <a:cs typeface="Arial" pitchFamily="34" charset="-120"/>
               </a:rPr>
-              <a:t>•  Genesis 22:1–2  — the first time Scripture calls something a “test.” Who is tested, and what is asked?</a:t>
-            </a:r>
-            <a:endParaRPr lang="en-US" sz="1600" dirty="0"/>
+              <a:t>Deuteronomy 8:1–10  </a:t>
+            </a:r>
+            <a:r>
+              <a:rPr lang="en-US" dirty="0">
+                <a:solidFill>
+                  <a:srgbClr val="000000"/>
+                </a:solidFill>
+                <a:latin typeface="Arial" pitchFamily="34" charset="0"/>
+                <a:ea typeface="Arial" pitchFamily="34" charset="-122"/>
+                <a:cs typeface="Arial" pitchFamily="34" charset="-120"/>
+              </a:rPr>
+              <a:t>- why did God lead Israel through the wilderness? Find the word “test” and note what it was testing.
+•  </a:t>
+            </a:r>
+            <a:r>
+              <a:rPr lang="en-US" b="1" dirty="0">
+                <a:solidFill>
+                  <a:srgbClr val="000000"/>
+                </a:solidFill>
+                <a:latin typeface="Arial" pitchFamily="34" charset="0"/>
+                <a:ea typeface="Arial" pitchFamily="34" charset="-122"/>
+                <a:cs typeface="Arial" pitchFamily="34" charset="-120"/>
+              </a:rPr>
+              <a:t>Genesis 22:1–2  </a:t>
+            </a:r>
+            <a:r>
+              <a:rPr lang="en-US" dirty="0">
+                <a:solidFill>
+                  <a:srgbClr val="000000"/>
+                </a:solidFill>
+                <a:latin typeface="Arial" pitchFamily="34" charset="0"/>
+                <a:ea typeface="Arial" pitchFamily="34" charset="-122"/>
+                <a:cs typeface="Arial" pitchFamily="34" charset="-120"/>
+              </a:rPr>
+              <a:t>- the first time Scripture calls something a “test.” Who is tested, and what is asked?</a:t>
+            </a:r>
+            <a:endParaRPr lang="en-US" sz="2000" dirty="0"/>
           </a:p>
         </p:txBody>
       </p:sp>
@@ -5382,11 +5360,11 @@
           <a:bodyPr wrap="square" lIns="0" tIns="0" rIns="0" bIns="0" rtlCol="0" anchor="t"/>
           <a:lstStyle/>
           <a:p>
-            <a:pPr algn="l" indent="0" marL="0">
+            <a:pPr marL="0" indent="0" algn="l">
               <a:buNone/>
             </a:pPr>
             <a:r>
-              <a:rPr lang="en-US" sz="1600" b="1" dirty="0">
+              <a:rPr lang="en-US" sz="2000" b="1" dirty="0">
                 <a:solidFill>
                   <a:srgbClr val="000000"/>
                 </a:solidFill>
@@ -5396,11 +5374,8 @@
               </a:rPr>
               <a:t>Next week begins Unit III — Testing: </a:t>
             </a:r>
-            <a:pPr algn="l" indent="0" marL="0">
-              <a:buNone/>
-            </a:pPr>
-            <a:r>
-              <a:rPr lang="en-US" sz="1550" i="1" dirty="0">
+            <a:r>
+              <a:rPr lang="en-US" i="1" dirty="0">
                 <a:solidFill>
                   <a:srgbClr val="000000"/>
                 </a:solidFill>
@@ -5410,7 +5385,7 @@
               </a:rPr>
               <a:t>Faith Tests Across the Covenants. In every era, God tests faith — and the tests always sit on the far side of grace.</a:t>
             </a:r>
-            <a:endParaRPr lang="en-US" sz="1600" dirty="0"/>
+            <a:endParaRPr lang="en-US" sz="2000" dirty="0"/>
           </a:p>
         </p:txBody>
       </p:sp>
@@ -5422,7 +5397,7 @@
         </p:nvSpPr>
         <p:spPr>
           <a:xfrm>
-            <a:off x="365760" y="3931920"/>
+            <a:off x="365760" y="3640518"/>
             <a:ext cx="8412480" cy="1051560"/>
           </a:xfrm>
           <a:prstGeom prst="rect">
@@ -5435,11 +5410,11 @@
           <a:bodyPr wrap="square" lIns="0" tIns="0" rIns="0" bIns="0" rtlCol="0" anchor="t"/>
           <a:lstStyle/>
           <a:p>
-            <a:pPr algn="l" indent="0" marL="0">
+            <a:pPr marL="0" indent="0" algn="l">
               <a:buNone/>
             </a:pPr>
             <a:r>
-              <a:rPr lang="en-US" sz="1500" b="1" dirty="0">
+              <a:rPr lang="en-US" b="1" dirty="0">
                 <a:solidFill>
                   <a:srgbClr val="000000"/>
                 </a:solidFill>
@@ -5447,14 +5422,38 @@
                 <a:ea typeface="Arial" pitchFamily="34" charset="-122"/>
                 <a:cs typeface="Arial" pitchFamily="34" charset="-120"/>
               </a:rPr>
-              <a:t>Carry this week in one sentence:
+              <a:t>This week in one sentence:
 </a:t>
             </a:r>
-            <a:pPr algn="l" indent="0" marL="0">
+            <a:r>
+              <a:rPr lang="en-US" sz="2000" b="1" i="1" dirty="0">
+                <a:solidFill>
+                  <a:srgbClr val="1F497D"/>
+                </a:solidFill>
+                <a:latin typeface="Arial" pitchFamily="34" charset="0"/>
+                <a:ea typeface="Arial" pitchFamily="34" charset="-122"/>
+                <a:cs typeface="Arial" pitchFamily="34" charset="-120"/>
+              </a:rPr>
+              <a:t>Compassion anchored in truth</a:t>
+            </a:r>
+            <a:r>
+              <a:rPr lang="en-US" sz="2000" b="1" i="1">
+                <a:solidFill>
+                  <a:srgbClr val="1F497D"/>
+                </a:solidFill>
+                <a:latin typeface="Arial" pitchFamily="34" charset="0"/>
+                <a:ea typeface="Arial" pitchFamily="34" charset="-122"/>
+                <a:cs typeface="Arial" pitchFamily="34" charset="-120"/>
+              </a:rPr>
+              <a:t>. </a:t>
+            </a:r>
+          </a:p>
+          <a:p>
+            <a:pPr marL="0" indent="0" algn="l">
               <a:buNone/>
             </a:pPr>
             <a:r>
-              <a:rPr lang="en-US" sz="1650" b="1" i="1" dirty="0">
+              <a:rPr lang="en-US" sz="2000" b="1" i="1">
                 <a:solidFill>
                   <a:srgbClr val="1F497D"/>
                 </a:solidFill>
@@ -5462,9 +5461,43 @@
                 <a:ea typeface="Arial" pitchFamily="34" charset="-122"/>
                 <a:cs typeface="Arial" pitchFamily="34" charset="-120"/>
               </a:rPr>
-              <a:t>Compassion anchored in truth. Emotion — a good servant, a catastrophic master.</a:t>
-            </a:r>
-            <a:endParaRPr lang="en-US" sz="1600" dirty="0"/>
+              <a:t>Emotion </a:t>
+            </a:r>
+            <a:r>
+              <a:rPr lang="en-US" sz="2000" b="1" i="1">
+                <a:solidFill>
+                  <a:srgbClr val="1F497D"/>
+                </a:solidFill>
+                <a:latin typeface="Arial" pitchFamily="34" charset="0"/>
+                <a:ea typeface="Arial" pitchFamily="34" charset="-122"/>
+                <a:cs typeface="Arial" pitchFamily="34" charset="-120"/>
+                <a:sym typeface="Wingdings" pitchFamily="2" charset="2"/>
+              </a:rPr>
+              <a:t></a:t>
+            </a:r>
+            <a:r>
+              <a:rPr lang="en-US" sz="2000" b="1" i="1">
+                <a:solidFill>
+                  <a:srgbClr val="1F497D"/>
+                </a:solidFill>
+                <a:latin typeface="Arial" pitchFamily="34" charset="0"/>
+                <a:ea typeface="Arial" pitchFamily="34" charset="-122"/>
+                <a:cs typeface="Arial" pitchFamily="34" charset="-120"/>
+              </a:rPr>
+              <a:t> </a:t>
+            </a:r>
+            <a:r>
+              <a:rPr lang="en-US" sz="2000" b="1" i="1" dirty="0">
+                <a:solidFill>
+                  <a:srgbClr val="1F497D"/>
+                </a:solidFill>
+                <a:latin typeface="Arial" pitchFamily="34" charset="0"/>
+                <a:ea typeface="Arial" pitchFamily="34" charset="-122"/>
+                <a:cs typeface="Arial" pitchFamily="34" charset="-120"/>
+              </a:rPr>
+              <a:t>a good servant, a catastrophic master.</a:t>
+            </a:r>
+            <a:endParaRPr lang="en-US" sz="2000" dirty="0"/>
           </a:p>
         </p:txBody>
       </p:sp>
@@ -5489,11 +5522,11 @@
           <a:bodyPr wrap="square" lIns="0" tIns="0" rIns="0" bIns="0" rtlCol="0" anchor="t"/>
           <a:lstStyle/>
           <a:p>
-            <a:pPr algn="ctr" indent="0" marL="0">
+            <a:pPr marL="0" indent="0" algn="ctr">
               <a:buNone/>
             </a:pPr>
             <a:r>
-              <a:rPr lang="en-US" sz="1700" b="1" i="1" dirty="0">
+              <a:rPr lang="en-US" b="1" i="1" dirty="0">
                 <a:solidFill>
                   <a:srgbClr val="1F497D"/>
                 </a:solidFill>
@@ -5501,9 +5534,25 @@
                 <a:ea typeface="Arial" pitchFamily="34" charset="-122"/>
                 <a:cs typeface="Arial" pitchFamily="34" charset="-120"/>
               </a:rPr>
-              <a:t>“Speaking the truth in love, we will… grow up into Christ.”  (Ephesians 4:15)</a:t>
-            </a:r>
-            <a:endParaRPr lang="en-US" sz="1600" dirty="0"/>
+              <a:t>“Speaking the truth in love, we will… grow up into Christ.”  </a:t>
+            </a:r>
+          </a:p>
+          <a:p>
+            <a:pPr marL="0" indent="0" algn="ctr">
+              <a:buNone/>
+            </a:pPr>
+            <a:r>
+              <a:rPr lang="en-US" b="1" i="1" dirty="0">
+                <a:solidFill>
+                  <a:srgbClr val="1F497D"/>
+                </a:solidFill>
+                <a:latin typeface="Arial" pitchFamily="34" charset="0"/>
+                <a:ea typeface="Arial" pitchFamily="34" charset="-122"/>
+                <a:cs typeface="Arial" pitchFamily="34" charset="-120"/>
+              </a:rPr>
+              <a:t>(Ephesians 4:15)</a:t>
+            </a:r>
+            <a:endParaRPr lang="en-US" dirty="0"/>
           </a:p>
         </p:txBody>
       </p:sp>
@@ -5528,18 +5577,18 @@
           <a:bodyPr wrap="square" lIns="0" tIns="0" rIns="0" bIns="0" rtlCol="0" anchor="t"/>
           <a:lstStyle/>
           <a:p>
-            <a:pPr algn="ctr" indent="0" marL="0">
+            <a:pPr marL="0" indent="0" algn="ctr">
               <a:buNone/>
             </a:pPr>
             <a:r>
-              <a:rPr lang="en-US" sz="1300" b="1" u="sng" dirty="0">
+              <a:rPr lang="en-US" b="1" u="sng" dirty="0">
                 <a:solidFill>
                   <a:srgbClr val="4F81BD"/>
                 </a:solidFill>
                 <a:latin typeface="Arial" pitchFamily="34" charset="0"/>
                 <a:ea typeface="Arial" pitchFamily="34" charset="-122"/>
                 <a:cs typeface="Arial" pitchFamily="34" charset="-120"/>
-                <a:hlinkClick r:id="rId1" invalidUrl="" action="" tgtFrame="" tooltip="" history="1" highlightClick="0" endSnd="0">
+                <a:hlinkClick r:id="rId3">
                   <a:extLst>
                     <a:ext uri="{A12FA001-AC4F-418D-AE19-62706E023703}">
                       <ahyp:hlinkClr xmlns:ahyp="http://schemas.microsoft.com/office/drawing/2018/hyperlinkcolor" val="tx"/>
@@ -5547,9 +5596,38 @@
                   </a:extLst>
                 </a:hlinkClick>
               </a:rPr>
-              <a:t>https://tinyurl.com/TeachTheWord</a:t>
-            </a:r>
-            <a:endParaRPr lang="en-US" sz="1600" dirty="0"/>
+              <a:t>https://</a:t>
+            </a:r>
+            <a:r>
+              <a:rPr lang="en-US" b="1" u="sng" dirty="0" err="1">
+                <a:solidFill>
+                  <a:srgbClr val="4F81BD"/>
+                </a:solidFill>
+                <a:latin typeface="Arial" pitchFamily="34" charset="0"/>
+                <a:ea typeface="Arial" pitchFamily="34" charset="-122"/>
+                <a:cs typeface="Arial" pitchFamily="34" charset="-120"/>
+                <a:hlinkClick r:id="rId3">
+                  <a:extLst>
+                    <a:ext uri="{A12FA001-AC4F-418D-AE19-62706E023703}">
+                      <ahyp:hlinkClr xmlns:ahyp="http://schemas.microsoft.com/office/drawing/2018/hyperlinkcolor" val="tx"/>
+                    </a:ext>
+                  </a:extLst>
+                </a:hlinkClick>
+              </a:rPr>
+              <a:t>TeachTheWord</a:t>
+            </a:r>
+            <a:r>
+              <a:rPr lang="en-US" b="1" u="sng" dirty="0" err="1">
+                <a:solidFill>
+                  <a:srgbClr val="4F81BD"/>
+                </a:solidFill>
+                <a:latin typeface="Arial" pitchFamily="34" charset="0"/>
+                <a:ea typeface="Arial" pitchFamily="34" charset="-122"/>
+                <a:cs typeface="Arial" pitchFamily="34" charset="-120"/>
+              </a:rPr>
+              <a:t>.Church</a:t>
+            </a:r>
+            <a:endParaRPr lang="en-US" sz="2400" dirty="0"/>
           </a:p>
         </p:txBody>
       </p:sp>
@@ -5567,26 +5645,26 @@
               <p:cTn id="2" dur="indefinite" nodeType="mainSeq">
                 <p:childTnLst>
                   <p:par>
-                    <p:cTn id="7" fill="hold">
+                    <p:cTn id="3" fill="hold">
                       <p:stCondLst>
                         <p:cond delay="indefinite"/>
                       </p:stCondLst>
                       <p:childTnLst>
                         <p:par>
-                          <p:cTn id="8" fill="hold">
+                          <p:cTn id="4" fill="hold">
                             <p:stCondLst>
                               <p:cond delay="0"/>
                             </p:stCondLst>
                             <p:childTnLst>
                               <p:par>
-                                <p:cTn id="3" presetID="42" presetClass="entr" presetSubtype="0" fill="hold" grpId="0" nodeType="clickEffect">
+                                <p:cTn id="5" presetID="42" presetClass="entr" presetSubtype="0" fill="hold" nodeType="clickEffect">
                                   <p:stCondLst>
                                     <p:cond delay="0"/>
                                   </p:stCondLst>
                                   <p:childTnLst>
                                     <p:set>
                                       <p:cBhvr>
-                                        <p:cTn id="4" dur="1" fill="hold">
+                                        <p:cTn id="6" dur="1" fill="hold">
                                           <p:stCondLst>
                                             <p:cond delay="0"/>
                                           </p:stCondLst>
@@ -5604,7 +5682,7 @@
                                     </p:set>
                                     <p:animEffect transition="in" filter="fade">
                                       <p:cBhvr>
-                                        <p:cTn id="5" dur="1000"/>
+                                        <p:cTn id="7" dur="1000"/>
                                         <p:tgtEl>
                                           <p:spTgt spid="4"/>
                                         </p:tgtEl>
@@ -5612,7 +5690,7 @@
                                     </p:animEffect>
                                     <p:anim calcmode="lin" valueType="num">
                                       <p:cBhvr>
-                                        <p:cTn id="6" dur="1000" fill="hold"/>
+                                        <p:cTn id="8" dur="1000" fill="hold"/>
                                         <p:tgtEl>
                                           <p:spTgt spid="4"/>
                                         </p:tgtEl>
@@ -5643,26 +5721,26 @@
                     </p:cTn>
                   </p:par>
                   <p:par>
-                    <p:cTn id="13" fill="hold">
+                    <p:cTn id="9" fill="hold">
                       <p:stCondLst>
                         <p:cond delay="indefinite"/>
                       </p:stCondLst>
                       <p:childTnLst>
                         <p:par>
-                          <p:cTn id="14" fill="hold">
+                          <p:cTn id="10" fill="hold">
                             <p:stCondLst>
                               <p:cond delay="0"/>
                             </p:stCondLst>
                             <p:childTnLst>
                               <p:par>
-                                <p:cTn id="9" presetID="42" presetClass="entr" presetSubtype="0" fill="hold" grpId="0" nodeType="clickEffect">
+                                <p:cTn id="11" presetID="42" presetClass="entr" presetSubtype="0" fill="hold" nodeType="clickEffect">
                                   <p:stCondLst>
                                     <p:cond delay="0"/>
                                   </p:stCondLst>
                                   <p:childTnLst>
                                     <p:set>
                                       <p:cBhvr>
-                                        <p:cTn id="10" dur="1" fill="hold">
+                                        <p:cTn id="12" dur="1" fill="hold">
                                           <p:stCondLst>
                                             <p:cond delay="0"/>
                                           </p:stCondLst>
@@ -5680,7 +5758,7 @@
                                     </p:set>
                                     <p:animEffect transition="in" filter="fade">
                                       <p:cBhvr>
-                                        <p:cTn id="11" dur="1000"/>
+                                        <p:cTn id="13" dur="1000"/>
                                         <p:tgtEl>
                                           <p:spTgt spid="5"/>
                                         </p:tgtEl>
@@ -5688,7 +5766,7 @@
                                     </p:animEffect>
                                     <p:anim calcmode="lin" valueType="num">
                                       <p:cBhvr>
-                                        <p:cTn id="12" dur="1000" fill="hold"/>
+                                        <p:cTn id="14" dur="1000" fill="hold"/>
                                         <p:tgtEl>
                                           <p:spTgt spid="5"/>
                                         </p:tgtEl>
@@ -5719,26 +5797,26 @@
                     </p:cTn>
                   </p:par>
                   <p:par>
-                    <p:cTn id="19" fill="hold">
+                    <p:cTn id="15" fill="hold">
                       <p:stCondLst>
                         <p:cond delay="indefinite"/>
                       </p:stCondLst>
                       <p:childTnLst>
                         <p:par>
-                          <p:cTn id="20" fill="hold">
+                          <p:cTn id="16" fill="hold">
                             <p:stCondLst>
                               <p:cond delay="0"/>
                             </p:stCondLst>
                             <p:childTnLst>
                               <p:par>
-                                <p:cTn id="15" presetID="42" presetClass="entr" presetSubtype="0" fill="hold" grpId="0" nodeType="clickEffect">
+                                <p:cTn id="17" presetID="42" presetClass="entr" presetSubtype="0" fill="hold" nodeType="clickEffect">
                                   <p:stCondLst>
                                     <p:cond delay="0"/>
                                   </p:stCondLst>
                                   <p:childTnLst>
                                     <p:set>
                                       <p:cBhvr>
-                                        <p:cTn id="16" dur="1" fill="hold">
+                                        <p:cTn id="18" dur="1" fill="hold">
                                           <p:stCondLst>
                                             <p:cond delay="0"/>
                                           </p:stCondLst>
@@ -5756,7 +5834,7 @@
                                     </p:set>
                                     <p:animEffect transition="in" filter="fade">
                                       <p:cBhvr>
-                                        <p:cTn id="17" dur="1000"/>
+                                        <p:cTn id="19" dur="1000"/>
                                         <p:tgtEl>
                                           <p:spTgt spid="6"/>
                                         </p:tgtEl>
@@ -5764,7 +5842,7 @@
                                     </p:animEffect>
                                     <p:anim calcmode="lin" valueType="num">
                                       <p:cBhvr>
-                                        <p:cTn id="18" dur="1000" fill="hold"/>
+                                        <p:cTn id="20" dur="1000" fill="hold"/>
                                         <p:tgtEl>
                                           <p:spTgt spid="6"/>
                                         </p:tgtEl>
@@ -5795,26 +5873,26 @@
                     </p:cTn>
                   </p:par>
                   <p:par>
-                    <p:cTn id="25" fill="hold">
+                    <p:cTn id="21" fill="hold">
                       <p:stCondLst>
                         <p:cond delay="indefinite"/>
                       </p:stCondLst>
                       <p:childTnLst>
                         <p:par>
-                          <p:cTn id="26" fill="hold">
+                          <p:cTn id="22" fill="hold">
                             <p:stCondLst>
                               <p:cond delay="0"/>
                             </p:stCondLst>
                             <p:childTnLst>
                               <p:par>
-                                <p:cTn id="21" presetID="42" presetClass="entr" presetSubtype="0" fill="hold" grpId="0" nodeType="clickEffect">
+                                <p:cTn id="23" presetID="42" presetClass="entr" presetSubtype="0" fill="hold" nodeType="clickEffect">
                                   <p:stCondLst>
                                     <p:cond delay="0"/>
                                   </p:stCondLst>
                                   <p:childTnLst>
                                     <p:set>
                                       <p:cBhvr>
-                                        <p:cTn id="22" dur="1" fill="hold">
+                                        <p:cTn id="24" dur="1" fill="hold">
                                           <p:stCondLst>
                                             <p:cond delay="0"/>
                                           </p:stCondLst>
@@ -5832,7 +5910,7 @@
                                     </p:set>
                                     <p:animEffect transition="in" filter="fade">
                                       <p:cBhvr>
-                                        <p:cTn id="23" dur="1000"/>
+                                        <p:cTn id="25" dur="1000"/>
                                         <p:tgtEl>
                                           <p:spTgt spid="7"/>
                                         </p:tgtEl>
@@ -5840,7 +5918,7 @@
                                     </p:animEffect>
                                     <p:anim calcmode="lin" valueType="num">
                                       <p:cBhvr>
-                                        <p:cTn id="24" dur="1000" fill="hold"/>
+                                        <p:cTn id="26" dur="1000" fill="hold"/>
                                         <p:tgtEl>
                                           <p:spTgt spid="7"/>
                                         </p:tgtEl>
@@ -6188,4 +6266,319 @@
     </a:ext>
   </a:extLst>
 </a:theme>
+</file>
+
+<file path=ppt/theme/theme2.xml><?xml version="1.0" encoding="utf-8"?>
+<a:theme xmlns:a="http://schemas.openxmlformats.org/drawingml/2006/main" name="Office Theme">
+  <a:themeElements>
+    <a:clrScheme name="Office">
+      <a:dk1>
+        <a:sysClr val="windowText" lastClr="000000"/>
+      </a:dk1>
+      <a:lt1>
+        <a:sysClr val="window" lastClr="FFFFFF"/>
+      </a:lt1>
+      <a:dk2>
+        <a:srgbClr val="0E2841"/>
+      </a:dk2>
+      <a:lt2>
+        <a:srgbClr val="E8E8E8"/>
+      </a:lt2>
+      <a:accent1>
+        <a:srgbClr val="156082"/>
+      </a:accent1>
+      <a:accent2>
+        <a:srgbClr val="E97132"/>
+      </a:accent2>
+      <a:accent3>
+        <a:srgbClr val="196B24"/>
+      </a:accent3>
+      <a:accent4>
+        <a:srgbClr val="0F9ED5"/>
+      </a:accent4>
+      <a:accent5>
+        <a:srgbClr val="A02B93"/>
+      </a:accent5>
+      <a:accent6>
+        <a:srgbClr val="4EA72E"/>
+      </a:accent6>
+      <a:hlink>
+        <a:srgbClr val="467886"/>
+      </a:hlink>
+      <a:folHlink>
+        <a:srgbClr val="96607D"/>
+      </a:folHlink>
+    </a:clrScheme>
+    <a:fontScheme name="Office">
+      <a:majorFont>
+        <a:latin typeface="Aptos Display" panose="02110004020202020204"/>
+        <a:ea typeface=""/>
+        <a:cs typeface=""/>
+        <a:font script="Jpan" typeface="游ゴシック Light"/>
+        <a:font script="Hang" typeface="맑은 고딕"/>
+        <a:font script="Hans" typeface="等线 Light"/>
+        <a:font script="Hant" typeface="新細明體"/>
+        <a:font script="Arab" typeface="Times New Roman"/>
+        <a:font script="Hebr" typeface="Times New Roman"/>
+        <a:font script="Thai" typeface="Angsana New"/>
+        <a:font script="Ethi" typeface="Nyala"/>
+        <a:font script="Beng" typeface="Vrinda"/>
+        <a:font script="Gujr" typeface="Shruti"/>
+        <a:font script="Khmr" typeface="MoolBoran"/>
+        <a:font script="Knda" typeface="Tunga"/>
+        <a:font script="Guru" typeface="Raavi"/>
+        <a:font script="Cans" typeface="Euphemia"/>
+        <a:font script="Cher" typeface="Plantagenet Cherokee"/>
+        <a:font script="Yiii" typeface="Microsoft Yi Baiti"/>
+        <a:font script="Tibt" typeface="Microsoft Himalaya"/>
+        <a:font script="Thaa" typeface="MV Boli"/>
+        <a:font script="Deva" typeface="Mangal"/>
+        <a:font script="Telu" typeface="Gautami"/>
+        <a:font script="Taml" typeface="Latha"/>
+        <a:font script="Syrc" typeface="Estrangelo Edessa"/>
+        <a:font script="Orya" typeface="Kalinga"/>
+        <a:font script="Mlym" typeface="Kartika"/>
+        <a:font script="Laoo" typeface="DokChampa"/>
+        <a:font script="Sinh" typeface="Iskoola Pota"/>
+        <a:font script="Mong" typeface="Mongolian Baiti"/>
+        <a:font script="Viet" typeface="Times New Roman"/>
+        <a:font script="Uigh" typeface="Microsoft Uighur"/>
+        <a:font script="Geor" typeface="Sylfaen"/>
+        <a:font script="Armn" typeface="Arial"/>
+        <a:font script="Bugi" typeface="Leelawadee UI"/>
+        <a:font script="Bopo" typeface="Microsoft JhengHei"/>
+        <a:font script="Java" typeface="Javanese Text"/>
+        <a:font script="Lisu" typeface="Segoe UI"/>
+        <a:font script="Mymr" typeface="Myanmar Text"/>
+        <a:font script="Nkoo" typeface="Ebrima"/>
+        <a:font script="Olck" typeface="Nirmala UI"/>
+        <a:font script="Osma" typeface="Ebrima"/>
+        <a:font script="Phag" typeface="Phagspa"/>
+        <a:font script="Syrn" typeface="Estrangelo Edessa"/>
+        <a:font script="Syrj" typeface="Estrangelo Edessa"/>
+        <a:font script="Syre" typeface="Estrangelo Edessa"/>
+        <a:font script="Sora" typeface="Nirmala UI"/>
+        <a:font script="Tale" typeface="Microsoft Tai Le"/>
+        <a:font script="Talu" typeface="Microsoft New Tai Lue"/>
+        <a:font script="Tfng" typeface="Ebrima"/>
+      </a:majorFont>
+      <a:minorFont>
+        <a:latin typeface="Aptos" panose="02110004020202020204"/>
+        <a:ea typeface=""/>
+        <a:cs typeface=""/>
+        <a:font script="Jpan" typeface="游ゴシック"/>
+        <a:font script="Hang" typeface="맑은 고딕"/>
+        <a:font script="Hans" typeface="等线"/>
+        <a:font script="Hant" typeface="新細明體"/>
+        <a:font script="Arab" typeface="Arial"/>
+        <a:font script="Hebr" typeface="Arial"/>
+        <a:font script="Thai" typeface="Cordia New"/>
+        <a:font script="Ethi" typeface="Nyala"/>
+        <a:font script="Beng" typeface="Vrinda"/>
+        <a:font script="Gujr" typeface="Shruti"/>
+        <a:font script="Khmr" typeface="DaunPenh"/>
+        <a:font script="Knda" typeface="Tunga"/>
+        <a:font script="Guru" typeface="Raavi"/>
+        <a:font script="Cans" typeface="Euphemia"/>
+        <a:font script="Cher" typeface="Plantagenet Cherokee"/>
+        <a:font script="Yiii" typeface="Microsoft Yi Baiti"/>
+        <a:font script="Tibt" typeface="Microsoft Himalaya"/>
+        <a:font script="Thaa" typeface="MV Boli"/>
+        <a:font script="Deva" typeface="Mangal"/>
+        <a:font script="Telu" typeface="Gautami"/>
+        <a:font script="Taml" typeface="Latha"/>
+        <a:font script="Syrc" typeface="Estrangelo Edessa"/>
+        <a:font script="Orya" typeface="Kalinga"/>
+        <a:font script="Mlym" typeface="Kartika"/>
+        <a:font script="Laoo" typeface="DokChampa"/>
+        <a:font script="Sinh" typeface="Iskoola Pota"/>
+        <a:font script="Mong" typeface="Mongolian Baiti"/>
+        <a:font script="Viet" typeface="Arial"/>
+        <a:font script="Uigh" typeface="Microsoft Uighur"/>
+        <a:font script="Geor" typeface="Sylfaen"/>
+        <a:font script="Armn" typeface="Arial"/>
+        <a:font script="Bugi" typeface="Leelawadee UI"/>
+        <a:font script="Bopo" typeface="Microsoft JhengHei"/>
+        <a:font script="Java" typeface="Javanese Text"/>
+        <a:font script="Lisu" typeface="Segoe UI"/>
+        <a:font script="Mymr" typeface="Myanmar Text"/>
+        <a:font script="Nkoo" typeface="Ebrima"/>
+        <a:font script="Olck" typeface="Nirmala UI"/>
+        <a:font script="Osma" typeface="Ebrima"/>
+        <a:font script="Phag" typeface="Phagspa"/>
+        <a:font script="Syrn" typeface="Estrangelo Edessa"/>
+        <a:font script="Syrj" typeface="Estrangelo Edessa"/>
+        <a:font script="Syre" typeface="Estrangelo Edessa"/>
+        <a:font script="Sora" typeface="Nirmala UI"/>
+        <a:font script="Tale" typeface="Microsoft Tai Le"/>
+        <a:font script="Talu" typeface="Microsoft New Tai Lue"/>
+        <a:font script="Tfng" typeface="Ebrima"/>
+      </a:minorFont>
+    </a:fontScheme>
+    <a:fmtScheme name="Office">
+      <a:fillStyleLst>
+        <a:solidFill>
+          <a:schemeClr val="phClr"/>
+        </a:solidFill>
+        <a:gradFill rotWithShape="1">
+          <a:gsLst>
+            <a:gs pos="0">
+              <a:schemeClr val="phClr">
+                <a:lumMod val="110000"/>
+                <a:satMod val="105000"/>
+                <a:tint val="67000"/>
+              </a:schemeClr>
+            </a:gs>
+            <a:gs pos="50000">
+              <a:schemeClr val="phClr">
+                <a:lumMod val="105000"/>
+                <a:satMod val="103000"/>
+                <a:tint val="73000"/>
+              </a:schemeClr>
+            </a:gs>
+            <a:gs pos="100000">
+              <a:schemeClr val="phClr">
+                <a:lumMod val="105000"/>
+                <a:satMod val="109000"/>
+                <a:tint val="81000"/>
+              </a:schemeClr>
+            </a:gs>
+          </a:gsLst>
+          <a:lin ang="5400000" scaled="0"/>
+        </a:gradFill>
+        <a:gradFill rotWithShape="1">
+          <a:gsLst>
+            <a:gs pos="0">
+              <a:schemeClr val="phClr">
+                <a:satMod val="103000"/>
+                <a:lumMod val="102000"/>
+                <a:tint val="94000"/>
+              </a:schemeClr>
+            </a:gs>
+            <a:gs pos="50000">
+              <a:schemeClr val="phClr">
+                <a:satMod val="110000"/>
+                <a:lumMod val="100000"/>
+                <a:shade val="100000"/>
+              </a:schemeClr>
+            </a:gs>
+            <a:gs pos="100000">
+              <a:schemeClr val="phClr">
+                <a:lumMod val="99000"/>
+                <a:satMod val="120000"/>
+                <a:shade val="78000"/>
+              </a:schemeClr>
+            </a:gs>
+          </a:gsLst>
+          <a:lin ang="5400000" scaled="0"/>
+        </a:gradFill>
+      </a:fillStyleLst>
+      <a:lnStyleLst>
+        <a:ln w="12700" cap="flat" cmpd="sng" algn="ctr">
+          <a:solidFill>
+            <a:schemeClr val="phClr"/>
+          </a:solidFill>
+          <a:prstDash val="solid"/>
+          <a:miter lim="800000"/>
+        </a:ln>
+        <a:ln w="19050" cap="flat" cmpd="sng" algn="ctr">
+          <a:solidFill>
+            <a:schemeClr val="phClr"/>
+          </a:solidFill>
+          <a:prstDash val="solid"/>
+          <a:miter lim="800000"/>
+        </a:ln>
+        <a:ln w="25400" cap="flat" cmpd="sng" algn="ctr">
+          <a:solidFill>
+            <a:schemeClr val="phClr"/>
+          </a:solidFill>
+          <a:prstDash val="solid"/>
+          <a:miter lim="800000"/>
+        </a:ln>
+      </a:lnStyleLst>
+      <a:effectStyleLst>
+        <a:effectStyle>
+          <a:effectLst/>
+        </a:effectStyle>
+        <a:effectStyle>
+          <a:effectLst/>
+        </a:effectStyle>
+        <a:effectStyle>
+          <a:effectLst>
+            <a:outerShdw blurRad="57150" dist="19050" dir="5400000" algn="ctr" rotWithShape="0">
+              <a:srgbClr val="000000">
+                <a:alpha val="63000"/>
+              </a:srgbClr>
+            </a:outerShdw>
+          </a:effectLst>
+        </a:effectStyle>
+      </a:effectStyleLst>
+      <a:bgFillStyleLst>
+        <a:solidFill>
+          <a:schemeClr val="phClr"/>
+        </a:solidFill>
+        <a:solidFill>
+          <a:schemeClr val="phClr">
+            <a:tint val="95000"/>
+            <a:satMod val="170000"/>
+          </a:schemeClr>
+        </a:solidFill>
+        <a:gradFill rotWithShape="1">
+          <a:gsLst>
+            <a:gs pos="0">
+              <a:schemeClr val="phClr">
+                <a:tint val="93000"/>
+                <a:satMod val="150000"/>
+                <a:shade val="98000"/>
+                <a:lumMod val="102000"/>
+              </a:schemeClr>
+            </a:gs>
+            <a:gs pos="50000">
+              <a:schemeClr val="phClr">
+                <a:tint val="98000"/>
+                <a:satMod val="130000"/>
+                <a:shade val="90000"/>
+                <a:lumMod val="103000"/>
+              </a:schemeClr>
+            </a:gs>
+            <a:gs pos="100000">
+              <a:schemeClr val="phClr">
+                <a:shade val="63000"/>
+                <a:satMod val="120000"/>
+              </a:schemeClr>
+            </a:gs>
+          </a:gsLst>
+          <a:lin ang="5400000" scaled="0"/>
+        </a:gradFill>
+      </a:bgFillStyleLst>
+    </a:fmtScheme>
+  </a:themeElements>
+  <a:objectDefaults>
+    <a:lnDef>
+      <a:spPr/>
+      <a:bodyPr/>
+      <a:lstStyle/>
+      <a:style>
+        <a:lnRef idx="2">
+          <a:schemeClr val="accent1"/>
+        </a:lnRef>
+        <a:fillRef idx="0">
+          <a:schemeClr val="accent1"/>
+        </a:fillRef>
+        <a:effectRef idx="1">
+          <a:schemeClr val="accent1"/>
+        </a:effectRef>
+        <a:fontRef idx="minor">
+          <a:schemeClr val="tx1"/>
+        </a:fontRef>
+      </a:style>
+    </a:lnDef>
+  </a:objectDefaults>
+  <a:extraClrSchemeLst/>
+  <a:extLst>
+    <a:ext uri="{05A4C25C-085E-4340-85A3-A5531E510DB2}">
+      <thm15:themeFamily xmlns:thm15="http://schemas.microsoft.com/office/thememl/2012/main" name="Office Theme" id="{2E142A2C-CD16-42D6-873A-C26D2A0506FA}" vid="{1BDDFF52-6CD6-40A5-AB3C-68EB2F1E4D0A}"/>
+    </a:ext>
+  </a:extLst>
+</a:theme>
 </file>
--- a/2026-Q4/06-LoveCompassionTruth/Week06-LoveCompassionAndTruth.pptx
+++ b/2026-Q4/06-LoveCompassionTruth/Week06-LoveCompassionAndTruth.pptx
@@ -4806,7 +4806,30 @@
                 <a:ea typeface="Arial" pitchFamily="34" charset="-122"/>
                 <a:cs typeface="Arial" pitchFamily="34" charset="-120"/>
               </a:rPr>
-              <a:t>Ten minutes — this is the week’s practice</a:t>
+              <a:t>Ten minutes </a:t>
+            </a:r>
+            <a:r>
+              <a:rPr lang="en-US" sz="2000" b="1" dirty="0">
+                <a:solidFill>
+                  <a:srgbClr val="4F81BD"/>
+                </a:solidFill>
+                <a:latin typeface="Arial" pitchFamily="34" charset="0"/>
+                <a:ea typeface="Arial" pitchFamily="34" charset="-122"/>
+                <a:cs typeface="Arial" pitchFamily="34" charset="-120"/>
+                <a:sym typeface="Wingdings" pitchFamily="2" charset="2"/>
+              </a:rPr>
+              <a:t></a:t>
+            </a:r>
+            <a:r>
+              <a:rPr lang="en-US" sz="2000" b="1" dirty="0">
+                <a:solidFill>
+                  <a:srgbClr val="4F81BD"/>
+                </a:solidFill>
+                <a:latin typeface="Arial" pitchFamily="34" charset="0"/>
+                <a:ea typeface="Arial" pitchFamily="34" charset="-122"/>
+                <a:cs typeface="Arial" pitchFamily="34" charset="-120"/>
+              </a:rPr>
+              <a:t> this is the week’s practice</a:t>
             </a:r>
             <a:endParaRPr lang="en-US" sz="2800" dirty="0"/>
           </a:p>
